--- a/presentation.pptx
+++ b/presentation.pptx
@@ -4,6 +4,9 @@
   <p:sldMasterIdLst>
     <p:sldMasterId id="2147483648" r:id="rId1"/>
   </p:sldMasterIdLst>
+  <p:notesMasterIdLst>
+    <p:notesMasterId r:id="rId12"/>
+  </p:notesMasterIdLst>
   <p:sldIdLst>
     <p:sldId id="256" r:id="rId2"/>
     <p:sldId id="257" r:id="rId3"/>
@@ -16,10 +19,7 @@
     <p:sldId id="264" r:id="rId10"/>
     <p:sldId id="265" r:id="rId11"/>
   </p:sldIdLst>
-  <p:notesMasterIdLst>
-    <p:notesMasterId r:id="rId12"/>
-  </p:notesMasterIdLst>
-  <p:sldSz cx="9144000" cy="5143500"/>
+  <p:sldSz cx="9144000" cy="5143500" type="screen16x9"/>
   <p:notesSz cx="5143500" cy="9144000"/>
   <p:defaultTextStyle>
     <a:lvl1pPr marL="0" algn="l" defTabSz="914400" rtl="0" eaLnBrk="1" latinLnBrk="0" hangingPunct="1">
@@ -113,6 +113,11 @@
       </a:defRPr>
     </a:lvl9pPr>
   </p:defaultTextStyle>
+  <p:extLst>
+    <p:ext uri="{EFAFB233-063F-42B5-8137-9DF3F51BA10A}">
+      <p15:sldGuideLst xmlns:p15="http://schemas.microsoft.com/office/powerpoint/2012/main"/>
+    </p:ext>
+  </p:extLst>
 </p:presentation>
 </file>
 
@@ -138,234 +143,10 @@
           <a:chExt cx="0" cy="0"/>
         </a:xfrm>
       </p:grpSpPr>
-      <p:sp>
-        <p:nvSpPr>
-          <p:cNvPr id="2" name="Header Placeholder 1"/>
-          <p:cNvSpPr>
-            <a:spLocks noGrp="1"/>
-          </p:cNvSpPr>
-          <p:nvPr>
-            <p:ph type="hdr" sz="quarter"/>
-          </p:nvPr>
-        </p:nvSpPr>
-        <p:spPr>
-          <a:xfrm>
-            <a:off x="0" y="0"/>
-            <a:ext cx="2971800" cy="458788"/>
-          </a:xfrm>
-          <a:prstGeom prst="rect">
-            <a:avLst/>
-          </a:prstGeom>
-        </p:spPr>
-        <p:txBody>
-          <a:bodyPr vert="horz" lIns="91440" tIns="45720" rIns="91440" bIns="45720" rtlCol="0"/>
-          <a:lstStyle>
-            <a:lvl1pPr algn="l">
-              <a:defRPr sz="1200"/>
-            </a:lvl1pPr>
-          </a:lstStyle>
-          <a:p>
-            <a:endParaRPr lang="en-US"/>
-          </a:p>
-        </p:txBody>
-      </p:sp>
-      <p:sp>
-        <p:nvSpPr>
-          <p:cNvPr id="3" name="Date Placeholder 2"/>
-          <p:cNvSpPr>
-            <a:spLocks noGrp="1"/>
-          </p:cNvSpPr>
-          <p:nvPr>
-            <p:ph type="dt" idx="1"/>
-          </p:nvPr>
-        </p:nvSpPr>
-        <p:spPr>
-          <a:xfrm>
-            <a:off x="3884613" y="0"/>
-            <a:ext cx="2971800" cy="458788"/>
-          </a:xfrm>
-          <a:prstGeom prst="rect">
-            <a:avLst/>
-          </a:prstGeom>
-        </p:spPr>
-        <p:txBody>
-          <a:bodyPr vert="horz" lIns="91440" tIns="45720" rIns="91440" bIns="45720" rtlCol="0"/>
-          <a:lstStyle>
-            <a:lvl1pPr algn="r">
-              <a:defRPr sz="1200"/>
-            </a:lvl1pPr>
-          </a:lstStyle>
-          <a:p>
-            <a:fld id="{5282F153-3F37-0F45-9E97-73ACFA13230C}" type="datetimeFigureOut">
-              <a:rPr lang="en-US"/>
-              <a:t>7/23/19</a:t>
-            </a:fld>
-            <a:endParaRPr lang="en-US"/>
-          </a:p>
-        </p:txBody>
-      </p:sp>
-      <p:sp>
-        <p:nvSpPr>
-          <p:cNvPr id="4" name="Slide Image Placeholder 3"/>
-          <p:cNvSpPr>
-            <a:spLocks noGrp="1" noRot="1" noChangeAspect="1"/>
-          </p:cNvSpPr>
-          <p:nvPr>
-            <p:ph type="sldImg" idx="2"/>
-          </p:nvPr>
-        </p:nvSpPr>
-        <p:spPr>
-          <a:xfrm>
-            <a:off x="685800" y="1143000"/>
-            <a:ext cx="5486400" cy="3086100"/>
-          </a:xfrm>
-          <a:prstGeom prst="rect">
-            <a:avLst/>
-          </a:prstGeom>
-          <a:noFill/>
-          <a:ln w="12700">
-            <a:solidFill>
-              <a:prstClr val="black"/>
-            </a:solidFill>
-          </a:ln>
-        </p:spPr>
-        <p:txBody>
-          <a:bodyPr vert="horz" lIns="91440" tIns="45720" rIns="91440" bIns="45720" rtlCol="0" anchor="ctr"/>
-          <a:lstStyle/>
-          <a:p>
-            <a:endParaRPr lang="en-US"/>
-          </a:p>
-        </p:txBody>
-      </p:sp>
-      <p:sp>
-        <p:nvSpPr>
-          <p:cNvPr id="5" name="Notes Placeholder 4"/>
-          <p:cNvSpPr>
-            <a:spLocks noGrp="1"/>
-          </p:cNvSpPr>
-          <p:nvPr>
-            <p:ph type="body" sz="quarter" idx="3"/>
-          </p:nvPr>
-        </p:nvSpPr>
-        <p:spPr>
-          <a:xfrm>
-            <a:off x="685800" y="4400550"/>
-            <a:ext cx="5486400" cy="3600450"/>
-          </a:xfrm>
-          <a:prstGeom prst="rect">
-            <a:avLst/>
-          </a:prstGeom>
-        </p:spPr>
-        <p:txBody>
-          <a:bodyPr vert="horz" lIns="91440" tIns="45720" rIns="91440" bIns="45720" rtlCol="0"/>
-          <a:lstStyle/>
-          <a:p>
-            <a:pPr lvl="0"/>
-            <a:r>
-              <a:rPr lang="en-US"/>
-              <a:t>Click to edit Master text styles</a:t>
-            </a:r>
-          </a:p>
-          <a:p>
-            <a:pPr lvl="1"/>
-            <a:r>
-              <a:rPr lang="en-US"/>
-              <a:t>Second level</a:t>
-            </a:r>
-          </a:p>
-          <a:p>
-            <a:pPr lvl="2"/>
-            <a:r>
-              <a:rPr lang="en-US"/>
-              <a:t>Third level</a:t>
-            </a:r>
-          </a:p>
-          <a:p>
-            <a:pPr lvl="3"/>
-            <a:r>
-              <a:rPr lang="en-US"/>
-              <a:t>Fourth level</a:t>
-            </a:r>
-          </a:p>
-          <a:p>
-            <a:pPr lvl="4"/>
-            <a:r>
-              <a:rPr lang="en-US"/>
-              <a:t>Fifth level</a:t>
-            </a:r>
-          </a:p>
-        </p:txBody>
-      </p:sp>
-      <p:sp>
-        <p:nvSpPr>
-          <p:cNvPr id="6" name="Footer Placeholder 5"/>
-          <p:cNvSpPr>
-            <a:spLocks noGrp="1"/>
-          </p:cNvSpPr>
-          <p:nvPr>
-            <p:ph type="ftr" sz="quarter" idx="4"/>
-          </p:nvPr>
-        </p:nvSpPr>
-        <p:spPr>
-          <a:xfrm>
-            <a:off x="0" y="8685213"/>
-            <a:ext cx="2971800" cy="458787"/>
-          </a:xfrm>
-          <a:prstGeom prst="rect">
-            <a:avLst/>
-          </a:prstGeom>
-        </p:spPr>
-        <p:txBody>
-          <a:bodyPr vert="horz" lIns="91440" tIns="45720" rIns="91440" bIns="45720" rtlCol="0" anchor="b"/>
-          <a:lstStyle>
-            <a:lvl1pPr algn="l">
-              <a:defRPr sz="1200"/>
-            </a:lvl1pPr>
-          </a:lstStyle>
-          <a:p>
-            <a:endParaRPr lang="en-US"/>
-          </a:p>
-        </p:txBody>
-      </p:sp>
-      <p:sp>
-        <p:nvSpPr>
-          <p:cNvPr id="7" name="Slide Number Placeholder 6"/>
-          <p:cNvSpPr>
-            <a:spLocks noGrp="1"/>
-          </p:cNvSpPr>
-          <p:nvPr>
-            <p:ph type="sldNum" sz="quarter" idx="5"/>
-          </p:nvPr>
-        </p:nvSpPr>
-        <p:spPr>
-          <a:xfrm>
-            <a:off x="3884613" y="8685213"/>
-            <a:ext cx="2971800" cy="458787"/>
-          </a:xfrm>
-          <a:prstGeom prst="rect">
-            <a:avLst/>
-          </a:prstGeom>
-        </p:spPr>
-        <p:txBody>
-          <a:bodyPr vert="horz" lIns="91440" tIns="45720" rIns="91440" bIns="45720" rtlCol="0" anchor="b"/>
-          <a:lstStyle>
-            <a:lvl1pPr algn="r">
-              <a:defRPr sz="1200"/>
-            </a:lvl1pPr>
-          </a:lstStyle>
-          <a:p>
-            <a:fld id="{CE5E9CC1-C706-0F49-92D6-E571CC5EEA8F}" type="slidenum">
-              <a:rPr lang="en-US"/>
-              <a:t>‹#›</a:t>
-            </a:fld>
-            <a:endParaRPr lang="en-US"/>
-          </a:p>
-        </p:txBody>
-      </p:sp>
     </p:spTree>
     <p:extLst>
       <p:ext uri="{BB962C8B-B14F-4D97-AF65-F5344CB8AC3E}">
-        <p14:creationId xmlns:p14="http://schemas.microsoft.com/office/powerpoint/2010/main" val="1024086991"/>
+        <p14:creationId xmlns:p14="http://schemas.microsoft.com/office/powerpoint/2010/main" val="1990382232"/>
       </p:ext>
     </p:extLst>
   </p:cSld>
@@ -509,10 +290,6 @@
           <a:bodyPr/>
           <a:lstStyle/>
           <a:p>
-            <a:r>
-              <a:rPr lang="en-US" dirty="0"/>
-              <a:t/>
-            </a:r>
             <a:endParaRPr lang="en-US" dirty="0"/>
           </a:p>
         </p:txBody>
@@ -597,10 +374,6 @@
           <a:bodyPr/>
           <a:lstStyle/>
           <a:p>
-            <a:r>
-              <a:rPr lang="en-US" dirty="0"/>
-              <a:t/>
-            </a:r>
             <a:endParaRPr lang="en-US" dirty="0"/>
           </a:p>
         </p:txBody>
@@ -685,10 +458,6 @@
           <a:bodyPr/>
           <a:lstStyle/>
           <a:p>
-            <a:r>
-              <a:rPr lang="en-US" dirty="0"/>
-              <a:t/>
-            </a:r>
             <a:endParaRPr lang="en-US" dirty="0"/>
           </a:p>
         </p:txBody>
@@ -773,10 +542,6 @@
           <a:bodyPr/>
           <a:lstStyle/>
           <a:p>
-            <a:r>
-              <a:rPr lang="en-US" dirty="0"/>
-              <a:t/>
-            </a:r>
             <a:endParaRPr lang="en-US" dirty="0"/>
           </a:p>
         </p:txBody>
@@ -861,10 +626,6 @@
           <a:bodyPr/>
           <a:lstStyle/>
           <a:p>
-            <a:r>
-              <a:rPr lang="en-US" dirty="0"/>
-              <a:t/>
-            </a:r>
             <a:endParaRPr lang="en-US" dirty="0"/>
           </a:p>
         </p:txBody>
@@ -949,10 +710,6 @@
           <a:bodyPr/>
           <a:lstStyle/>
           <a:p>
-            <a:r>
-              <a:rPr lang="en-US" dirty="0"/>
-              <a:t/>
-            </a:r>
             <a:endParaRPr lang="en-US" dirty="0"/>
           </a:p>
         </p:txBody>
@@ -1037,10 +794,6 @@
           <a:bodyPr/>
           <a:lstStyle/>
           <a:p>
-            <a:r>
-              <a:rPr lang="en-US" dirty="0"/>
-              <a:t/>
-            </a:r>
             <a:endParaRPr lang="en-US" dirty="0"/>
           </a:p>
         </p:txBody>
@@ -1125,10 +878,6 @@
           <a:bodyPr/>
           <a:lstStyle/>
           <a:p>
-            <a:r>
-              <a:rPr lang="en-US" dirty="0"/>
-              <a:t/>
-            </a:r>
             <a:endParaRPr lang="en-US" dirty="0"/>
           </a:p>
         </p:txBody>
@@ -1213,10 +962,6 @@
           <a:bodyPr/>
           <a:lstStyle/>
           <a:p>
-            <a:r>
-              <a:rPr lang="en-US" dirty="0"/>
-              <a:t/>
-            </a:r>
             <a:endParaRPr lang="en-US" dirty="0"/>
           </a:p>
         </p:txBody>
@@ -1301,10 +1046,6 @@
           <a:bodyPr/>
           <a:lstStyle/>
           <a:p>
-            <a:r>
-              <a:rPr lang="en-US" dirty="0"/>
-              <a:t/>
-            </a:r>
             <a:endParaRPr lang="en-US" dirty="0"/>
           </a:p>
         </p:txBody>
@@ -1378,6 +1119,11 @@
 <file path=ppt/slideMasters/slideMaster1.xml><?xml version="1.0" encoding="utf-8"?>
 <p:sldMaster xmlns:a="http://schemas.openxmlformats.org/drawingml/2006/main" xmlns:r="http://schemas.openxmlformats.org/officeDocument/2006/relationships" xmlns:p="http://schemas.openxmlformats.org/presentationml/2006/main">
   <p:cSld>
+    <p:bg>
+      <p:bgRef idx="1001">
+        <a:schemeClr val="bg1"/>
+      </p:bgRef>
+    </p:bg>
     <p:spTree>
       <p:nvGrpSpPr>
         <p:cNvPr id="1" name=""/>
@@ -1660,6 +1406,7 @@
         <a:solidFill>
           <a:srgbClr val="0F172A"/>
         </a:solidFill>
+        <a:effectLst/>
       </p:bgPr>
     </p:bg>
     <p:spTree>
@@ -1695,81 +1442,13 @@
           </a:solidFill>
           <a:ln/>
         </p:spPr>
-      </p:sp>
-      <p:sp>
-        <p:nvSpPr>
-          <p:cNvPr id="3" name="Shape 1"/>
-          <p:cNvSpPr/>
-          <p:nvPr/>
-        </p:nvSpPr>
-        <p:spPr>
-          <a:xfrm>
-            <a:off x="6583680" y="-1097280"/>
-            <a:ext cx="5029200" cy="5029200"/>
-          </a:xfrm>
-          <a:prstGeom prst="ellipse">
-            <a:avLst/>
-          </a:prstGeom>
-          <a:solidFill>
-            <a:srgbClr val="1E3A5F"/>
-          </a:solidFill>
-          <a:ln w="12700">
-            <a:solidFill>
-              <a:srgbClr val="1E3A5F"/>
-            </a:solidFill>
-            <a:prstDash val="solid"/>
-          </a:ln>
-        </p:spPr>
-      </p:sp>
-      <p:sp>
-        <p:nvSpPr>
-          <p:cNvPr id="4" name="Shape 2"/>
-          <p:cNvSpPr/>
-          <p:nvPr/>
-        </p:nvSpPr>
-        <p:spPr>
-          <a:xfrm>
-            <a:off x="7315200" y="-365760"/>
-            <a:ext cx="3474720" cy="3474720"/>
-          </a:xfrm>
-          <a:prstGeom prst="ellipse">
-            <a:avLst/>
-          </a:prstGeom>
-          <a:solidFill>
-            <a:srgbClr val="0A2540"/>
-          </a:solidFill>
-          <a:ln w="12700">
-            <a:solidFill>
-              <a:srgbClr val="0A2540"/>
-            </a:solidFill>
-            <a:prstDash val="solid"/>
-          </a:ln>
-        </p:spPr>
-      </p:sp>
-      <p:sp>
-        <p:nvSpPr>
-          <p:cNvPr id="5" name="Shape 3"/>
-          <p:cNvSpPr/>
-          <p:nvPr/>
-        </p:nvSpPr>
-        <p:spPr>
-          <a:xfrm>
-            <a:off x="7955280" y="274320"/>
-            <a:ext cx="2194560" cy="2194560"/>
-          </a:xfrm>
-          <a:prstGeom prst="ellipse">
-            <a:avLst/>
-          </a:prstGeom>
-          <a:solidFill>
-            <a:srgbClr val="00B4D8"/>
-          </a:solidFill>
-          <a:ln w="12700">
-            <a:solidFill>
-              <a:srgbClr val="00B4D8"/>
-            </a:solidFill>
-            <a:prstDash val="solid"/>
-          </a:ln>
-        </p:spPr>
+        <p:txBody>
+          <a:bodyPr/>
+          <a:lstStyle/>
+          <a:p>
+            <a:endParaRPr lang="fr-FR"/>
+          </a:p>
+        </p:txBody>
       </p:sp>
       <p:sp>
         <p:nvSpPr>
@@ -1792,6 +1471,13 @@
           </a:solidFill>
           <a:ln/>
         </p:spPr>
+        <p:txBody>
+          <a:bodyPr/>
+          <a:lstStyle/>
+          <a:p>
+            <a:endParaRPr lang="fr-FR"/>
+          </a:p>
+        </p:txBody>
       </p:sp>
       <p:sp>
         <p:nvSpPr>
@@ -1814,7 +1500,7 @@
           <a:bodyPr wrap="square" lIns="0" tIns="0" rIns="0" bIns="0" rtlCol="0" anchor="ctr"/>
           <a:lstStyle/>
           <a:p>
-            <a:pPr algn="ctr" indent="0" marL="0">
+            <a:pPr marL="0" indent="0" algn="ctr">
               <a:buNone/>
             </a:pPr>
             <a:r>
@@ -1850,7 +1536,7 @@
           <a:bodyPr wrap="square" lIns="0" tIns="0" rIns="0" bIns="0" rtlCol="0" anchor="ctr"/>
           <a:lstStyle/>
           <a:p>
-            <a:pPr indent="0" marL="0">
+            <a:pPr marL="0" indent="0">
               <a:buNone/>
             </a:pPr>
             <a:r>
@@ -1889,7 +1575,7 @@
           <a:bodyPr wrap="square" lIns="0" tIns="0" rIns="0" bIns="0" rtlCol="0" anchor="ctr"/>
           <a:lstStyle/>
           <a:p>
-            <a:pPr indent="0" marL="0">
+            <a:pPr marL="0" indent="0">
               <a:buNone/>
             </a:pPr>
             <a:r>
@@ -1928,7 +1614,7 @@
           <a:bodyPr wrap="square" lIns="0" tIns="0" rIns="0" bIns="0" rtlCol="0" anchor="ctr"/>
           <a:lstStyle/>
           <a:p>
-            <a:pPr indent="0" marL="0">
+            <a:pPr marL="0" indent="0">
               <a:lnSpc>
                 <a:spcPct val="140000"/>
               </a:lnSpc>
@@ -1948,7 +1634,7 @@
             <a:endParaRPr lang="en-US" sz="1500" dirty="0"/>
           </a:p>
           <a:p>
-            <a:pPr indent="0" marL="0">
+            <a:pPr marL="0" indent="0">
               <a:lnSpc>
                 <a:spcPct val="140000"/>
               </a:lnSpc>
@@ -1993,13 +1679,20 @@
             <a:prstDash val="solid"/>
           </a:ln>
           <a:effectLst>
-            <a:outerShdw sx="100000" sy="100000" kx="0" ky="0" algn="bl" rotWithShape="0" blurRad="101600" dist="38100" dir="8100000">
+            <a:outerShdw blurRad="101600" dist="38100" dir="8100000" algn="bl" rotWithShape="0">
               <a:srgbClr val="000000">
                 <a:alpha val="12000"/>
               </a:srgbClr>
             </a:outerShdw>
           </a:effectLst>
         </p:spPr>
+        <p:txBody>
+          <a:bodyPr/>
+          <a:lstStyle/>
+          <a:p>
+            <a:endParaRPr lang="fr-FR"/>
+          </a:p>
+        </p:txBody>
       </p:sp>
       <p:sp>
         <p:nvSpPr>
@@ -2022,7 +1715,7 @@
           <a:bodyPr wrap="square" lIns="0" tIns="0" rIns="0" bIns="0" rtlCol="0" anchor="ctr"/>
           <a:lstStyle/>
           <a:p>
-            <a:pPr algn="ctr" indent="0" marL="0">
+            <a:pPr marL="0" indent="0" algn="ctr">
               <a:buNone/>
             </a:pPr>
             <a:r>
@@ -2061,7 +1754,7 @@
           <a:bodyPr wrap="square" lIns="0" tIns="0" rIns="0" bIns="0" rtlCol="0" anchor="ctr"/>
           <a:lstStyle/>
           <a:p>
-            <a:pPr algn="ctr" indent="0" marL="0">
+            <a:pPr marL="0" indent="0" algn="ctr">
               <a:lnSpc>
                 <a:spcPct val="120000"/>
               </a:lnSpc>
@@ -2081,7 +1774,7 @@
             <a:endParaRPr lang="en-US" sz="1100" dirty="0"/>
           </a:p>
           <a:p>
-            <a:pPr algn="ctr" indent="0" marL="0">
+            <a:pPr marL="0" indent="0" algn="ctr">
               <a:lnSpc>
                 <a:spcPct val="120000"/>
               </a:lnSpc>
@@ -2126,13 +1819,20 @@
             <a:prstDash val="solid"/>
           </a:ln>
           <a:effectLst>
-            <a:outerShdw sx="100000" sy="100000" kx="0" ky="0" algn="bl" rotWithShape="0" blurRad="101600" dist="38100" dir="8100000">
+            <a:outerShdw blurRad="101600" dist="38100" dir="8100000" algn="bl" rotWithShape="0">
               <a:srgbClr val="000000">
                 <a:alpha val="12000"/>
               </a:srgbClr>
             </a:outerShdw>
           </a:effectLst>
         </p:spPr>
+        <p:txBody>
+          <a:bodyPr/>
+          <a:lstStyle/>
+          <a:p>
+            <a:endParaRPr lang="fr-FR"/>
+          </a:p>
+        </p:txBody>
       </p:sp>
       <p:sp>
         <p:nvSpPr>
@@ -2155,7 +1855,7 @@
           <a:bodyPr wrap="square" lIns="0" tIns="0" rIns="0" bIns="0" rtlCol="0" anchor="ctr"/>
           <a:lstStyle/>
           <a:p>
-            <a:pPr algn="ctr" indent="0" marL="0">
+            <a:pPr marL="0" indent="0" algn="ctr">
               <a:buNone/>
             </a:pPr>
             <a:r>
@@ -2194,7 +1894,7 @@
           <a:bodyPr wrap="square" lIns="0" tIns="0" rIns="0" bIns="0" rtlCol="0" anchor="ctr"/>
           <a:lstStyle/>
           <a:p>
-            <a:pPr algn="ctr" indent="0" marL="0">
+            <a:pPr marL="0" indent="0" algn="ctr">
               <a:lnSpc>
                 <a:spcPct val="120000"/>
               </a:lnSpc>
@@ -2214,7 +1914,7 @@
             <a:endParaRPr lang="en-US" sz="1100" dirty="0"/>
           </a:p>
           <a:p>
-            <a:pPr algn="ctr" indent="0" marL="0">
+            <a:pPr marL="0" indent="0" algn="ctr">
               <a:lnSpc>
                 <a:spcPct val="120000"/>
               </a:lnSpc>
@@ -2259,13 +1959,20 @@
             <a:prstDash val="solid"/>
           </a:ln>
           <a:effectLst>
-            <a:outerShdw sx="100000" sy="100000" kx="0" ky="0" algn="bl" rotWithShape="0" blurRad="101600" dist="38100" dir="8100000">
+            <a:outerShdw blurRad="101600" dist="38100" dir="8100000" algn="bl" rotWithShape="0">
               <a:srgbClr val="000000">
                 <a:alpha val="12000"/>
               </a:srgbClr>
             </a:outerShdw>
           </a:effectLst>
         </p:spPr>
+        <p:txBody>
+          <a:bodyPr/>
+          <a:lstStyle/>
+          <a:p>
+            <a:endParaRPr lang="fr-FR"/>
+          </a:p>
+        </p:txBody>
       </p:sp>
       <p:sp>
         <p:nvSpPr>
@@ -2288,7 +1995,7 @@
           <a:bodyPr wrap="square" lIns="0" tIns="0" rIns="0" bIns="0" rtlCol="0" anchor="ctr"/>
           <a:lstStyle/>
           <a:p>
-            <a:pPr algn="ctr" indent="0" marL="0">
+            <a:pPr marL="0" indent="0" algn="ctr">
               <a:buNone/>
             </a:pPr>
             <a:r>
@@ -2327,7 +2034,7 @@
           <a:bodyPr wrap="square" lIns="0" tIns="0" rIns="0" bIns="0" rtlCol="0" anchor="ctr"/>
           <a:lstStyle/>
           <a:p>
-            <a:pPr algn="ctr" indent="0" marL="0">
+            <a:pPr marL="0" indent="0" algn="ctr">
               <a:lnSpc>
                 <a:spcPct val="120000"/>
               </a:lnSpc>
@@ -2347,7 +2054,7 @@
             <a:endParaRPr lang="en-US" sz="1100" dirty="0"/>
           </a:p>
           <a:p>
-            <a:pPr algn="ctr" indent="0" marL="0">
+            <a:pPr marL="0" indent="0" algn="ctr">
               <a:lnSpc>
                 <a:spcPct val="120000"/>
               </a:lnSpc>
@@ -2392,13 +2099,20 @@
             <a:prstDash val="solid"/>
           </a:ln>
           <a:effectLst>
-            <a:outerShdw sx="100000" sy="100000" kx="0" ky="0" algn="bl" rotWithShape="0" blurRad="101600" dist="38100" dir="8100000">
+            <a:outerShdw blurRad="101600" dist="38100" dir="8100000" algn="bl" rotWithShape="0">
               <a:srgbClr val="000000">
                 <a:alpha val="12000"/>
               </a:srgbClr>
             </a:outerShdw>
           </a:effectLst>
         </p:spPr>
+        <p:txBody>
+          <a:bodyPr/>
+          <a:lstStyle/>
+          <a:p>
+            <a:endParaRPr lang="fr-FR"/>
+          </a:p>
+        </p:txBody>
       </p:sp>
       <p:sp>
         <p:nvSpPr>
@@ -2421,7 +2135,7 @@
           <a:bodyPr wrap="square" lIns="0" tIns="0" rIns="0" bIns="0" rtlCol="0" anchor="ctr"/>
           <a:lstStyle/>
           <a:p>
-            <a:pPr algn="ctr" indent="0" marL="0">
+            <a:pPr marL="0" indent="0" algn="ctr">
               <a:buNone/>
             </a:pPr>
             <a:r>
@@ -2460,7 +2174,7 @@
           <a:bodyPr wrap="square" lIns="0" tIns="0" rIns="0" bIns="0" rtlCol="0" anchor="ctr"/>
           <a:lstStyle/>
           <a:p>
-            <a:pPr algn="ctr" indent="0" marL="0">
+            <a:pPr marL="0" indent="0" algn="ctr">
               <a:lnSpc>
                 <a:spcPct val="120000"/>
               </a:lnSpc>
@@ -2480,7 +2194,7 @@
             <a:endParaRPr lang="en-US" sz="1100" dirty="0"/>
           </a:p>
           <a:p>
-            <a:pPr algn="ctr" indent="0" marL="0">
+            <a:pPr marL="0" indent="0" algn="ctr">
               <a:lnSpc>
                 <a:spcPct val="120000"/>
               </a:lnSpc>
@@ -2517,6 +2231,7 @@
         <a:solidFill>
           <a:srgbClr val="0F172A"/>
         </a:solidFill>
+        <a:effectLst/>
       </p:bgPr>
     </p:bg>
     <p:spTree>
@@ -2552,6 +2267,13 @@
           </a:solidFill>
           <a:ln/>
         </p:spPr>
+        <p:txBody>
+          <a:bodyPr/>
+          <a:lstStyle/>
+          <a:p>
+            <a:endParaRPr lang="fr-FR"/>
+          </a:p>
+        </p:txBody>
       </p:sp>
       <p:sp>
         <p:nvSpPr>
@@ -2574,11 +2296,11 @@
           <a:bodyPr wrap="square" lIns="0" tIns="0" rIns="0" bIns="0" rtlCol="0" anchor="ctr"/>
           <a:lstStyle/>
           <a:p>
-            <a:pPr indent="0" marL="0">
-              <a:buNone/>
-            </a:pPr>
-            <a:r>
-              <a:rPr lang="en-US" sz="1100" b="1" spc="300" kern="0" dirty="0">
+            <a:pPr marL="0" indent="0">
+              <a:buNone/>
+            </a:pPr>
+            <a:r>
+              <a:rPr lang="en-US" sz="1100" b="1" kern="0" spc="300" dirty="0">
                 <a:solidFill>
                   <a:srgbClr val="00B4D8"/>
                 </a:solidFill>
@@ -2610,7 +2332,7 @@
           <a:bodyPr wrap="square" lIns="0" tIns="0" rIns="0" bIns="0" rtlCol="0" anchor="ctr"/>
           <a:lstStyle/>
           <a:p>
-            <a:pPr indent="0" marL="0">
+            <a:pPr marL="0" indent="0">
               <a:buNone/>
             </a:pPr>
             <a:r>
@@ -2649,13 +2371,20 @@
             <a:prstDash val="solid"/>
           </a:ln>
           <a:effectLst>
-            <a:outerShdw sx="100000" sy="100000" kx="0" ky="0" algn="bl" rotWithShape="0" blurRad="101600" dist="38100" dir="8100000">
+            <a:outerShdw blurRad="101600" dist="38100" dir="8100000" algn="bl" rotWithShape="0">
               <a:srgbClr val="000000">
                 <a:alpha val="12000"/>
               </a:srgbClr>
             </a:outerShdw>
           </a:effectLst>
         </p:spPr>
+        <p:txBody>
+          <a:bodyPr/>
+          <a:lstStyle/>
+          <a:p>
+            <a:endParaRPr lang="fr-FR"/>
+          </a:p>
+        </p:txBody>
       </p:sp>
       <p:sp>
         <p:nvSpPr>
@@ -2676,6 +2405,13 @@
           </a:solidFill>
           <a:ln/>
         </p:spPr>
+        <p:txBody>
+          <a:bodyPr/>
+          <a:lstStyle/>
+          <a:p>
+            <a:endParaRPr lang="fr-FR"/>
+          </a:p>
+        </p:txBody>
       </p:sp>
       <p:sp>
         <p:nvSpPr>
@@ -2698,7 +2434,7 @@
           <a:bodyPr wrap="square" lIns="0" tIns="0" rIns="0" bIns="0" rtlCol="0" anchor="ctr"/>
           <a:lstStyle/>
           <a:p>
-            <a:pPr algn="ctr" indent="0" marL="0">
+            <a:pPr marL="0" indent="0" algn="ctr">
               <a:buNone/>
             </a:pPr>
             <a:r>
@@ -2734,7 +2470,7 @@
           <a:bodyPr wrap="square" lIns="0" tIns="0" rIns="0" bIns="0" rtlCol="0" anchor="ctr"/>
           <a:lstStyle/>
           <a:p>
-            <a:pPr indent="0" marL="0">
+            <a:pPr marL="0" indent="0">
               <a:buNone/>
             </a:pPr>
             <a:r>
@@ -2770,7 +2506,7 @@
           <a:bodyPr wrap="square" lIns="0" tIns="0" rIns="0" bIns="0" rtlCol="0" anchor="ctr"/>
           <a:lstStyle/>
           <a:p>
-            <a:pPr indent="0" marL="0">
+            <a:pPr marL="0" indent="0">
               <a:lnSpc>
                 <a:spcPct val="135000"/>
               </a:lnSpc>
@@ -2812,13 +2548,20 @@
             <a:prstDash val="solid"/>
           </a:ln>
           <a:effectLst>
-            <a:outerShdw sx="100000" sy="100000" kx="0" ky="0" algn="bl" rotWithShape="0" blurRad="101600" dist="38100" dir="8100000">
+            <a:outerShdw blurRad="101600" dist="38100" dir="8100000" algn="bl" rotWithShape="0">
               <a:srgbClr val="000000">
                 <a:alpha val="12000"/>
               </a:srgbClr>
             </a:outerShdw>
           </a:effectLst>
         </p:spPr>
+        <p:txBody>
+          <a:bodyPr/>
+          <a:lstStyle/>
+          <a:p>
+            <a:endParaRPr lang="fr-FR"/>
+          </a:p>
+        </p:txBody>
       </p:sp>
       <p:sp>
         <p:nvSpPr>
@@ -2839,6 +2582,13 @@
           </a:solidFill>
           <a:ln/>
         </p:spPr>
+        <p:txBody>
+          <a:bodyPr/>
+          <a:lstStyle/>
+          <a:p>
+            <a:endParaRPr lang="fr-FR"/>
+          </a:p>
+        </p:txBody>
       </p:sp>
       <p:sp>
         <p:nvSpPr>
@@ -2861,7 +2611,7 @@
           <a:bodyPr wrap="square" lIns="0" tIns="0" rIns="0" bIns="0" rtlCol="0" anchor="ctr"/>
           <a:lstStyle/>
           <a:p>
-            <a:pPr algn="ctr" indent="0" marL="0">
+            <a:pPr marL="0" indent="0" algn="ctr">
               <a:buNone/>
             </a:pPr>
             <a:r>
@@ -2897,7 +2647,7 @@
           <a:bodyPr wrap="square" lIns="0" tIns="0" rIns="0" bIns="0" rtlCol="0" anchor="ctr"/>
           <a:lstStyle/>
           <a:p>
-            <a:pPr indent="0" marL="0">
+            <a:pPr marL="0" indent="0">
               <a:buNone/>
             </a:pPr>
             <a:r>
@@ -2933,7 +2683,7 @@
           <a:bodyPr wrap="square" lIns="0" tIns="0" rIns="0" bIns="0" rtlCol="0" anchor="ctr"/>
           <a:lstStyle/>
           <a:p>
-            <a:pPr indent="0" marL="0">
+            <a:pPr marL="0" indent="0">
               <a:lnSpc>
                 <a:spcPct val="135000"/>
               </a:lnSpc>
@@ -2975,13 +2725,20 @@
             <a:prstDash val="solid"/>
           </a:ln>
           <a:effectLst>
-            <a:outerShdw sx="100000" sy="100000" kx="0" ky="0" algn="bl" rotWithShape="0" blurRad="101600" dist="38100" dir="8100000">
+            <a:outerShdw blurRad="101600" dist="38100" dir="8100000" algn="bl" rotWithShape="0">
               <a:srgbClr val="000000">
                 <a:alpha val="12000"/>
               </a:srgbClr>
             </a:outerShdw>
           </a:effectLst>
         </p:spPr>
+        <p:txBody>
+          <a:bodyPr/>
+          <a:lstStyle/>
+          <a:p>
+            <a:endParaRPr lang="fr-FR"/>
+          </a:p>
+        </p:txBody>
       </p:sp>
       <p:sp>
         <p:nvSpPr>
@@ -3002,6 +2759,13 @@
           </a:solidFill>
           <a:ln/>
         </p:spPr>
+        <p:txBody>
+          <a:bodyPr/>
+          <a:lstStyle/>
+          <a:p>
+            <a:endParaRPr lang="fr-FR"/>
+          </a:p>
+        </p:txBody>
       </p:sp>
       <p:sp>
         <p:nvSpPr>
@@ -3024,7 +2788,7 @@
           <a:bodyPr wrap="square" lIns="0" tIns="0" rIns="0" bIns="0" rtlCol="0" anchor="ctr"/>
           <a:lstStyle/>
           <a:p>
-            <a:pPr algn="ctr" indent="0" marL="0">
+            <a:pPr marL="0" indent="0" algn="ctr">
               <a:buNone/>
             </a:pPr>
             <a:r>
@@ -3060,7 +2824,7 @@
           <a:bodyPr wrap="square" lIns="0" tIns="0" rIns="0" bIns="0" rtlCol="0" anchor="ctr"/>
           <a:lstStyle/>
           <a:p>
-            <a:pPr indent="0" marL="0">
+            <a:pPr marL="0" indent="0">
               <a:buNone/>
             </a:pPr>
             <a:r>
@@ -3096,7 +2860,7 @@
           <a:bodyPr wrap="square" lIns="0" tIns="0" rIns="0" bIns="0" rtlCol="0" anchor="ctr"/>
           <a:lstStyle/>
           <a:p>
-            <a:pPr indent="0" marL="0">
+            <a:pPr marL="0" indent="0">
               <a:lnSpc>
                 <a:spcPct val="135000"/>
               </a:lnSpc>
@@ -3138,13 +2902,20 @@
             <a:prstDash val="solid"/>
           </a:ln>
           <a:effectLst>
-            <a:outerShdw sx="100000" sy="100000" kx="0" ky="0" algn="bl" rotWithShape="0" blurRad="101600" dist="38100" dir="8100000">
+            <a:outerShdw blurRad="101600" dist="38100" dir="8100000" algn="bl" rotWithShape="0">
               <a:srgbClr val="000000">
                 <a:alpha val="12000"/>
               </a:srgbClr>
             </a:outerShdw>
           </a:effectLst>
         </p:spPr>
+        <p:txBody>
+          <a:bodyPr/>
+          <a:lstStyle/>
+          <a:p>
+            <a:endParaRPr lang="fr-FR"/>
+          </a:p>
+        </p:txBody>
       </p:sp>
       <p:sp>
         <p:nvSpPr>
@@ -3165,6 +2936,13 @@
           </a:solidFill>
           <a:ln/>
         </p:spPr>
+        <p:txBody>
+          <a:bodyPr/>
+          <a:lstStyle/>
+          <a:p>
+            <a:endParaRPr lang="fr-FR"/>
+          </a:p>
+        </p:txBody>
       </p:sp>
       <p:sp>
         <p:nvSpPr>
@@ -3187,7 +2965,7 @@
           <a:bodyPr wrap="square" lIns="0" tIns="0" rIns="0" bIns="0" rtlCol="0" anchor="ctr"/>
           <a:lstStyle/>
           <a:p>
-            <a:pPr algn="ctr" indent="0" marL="0">
+            <a:pPr marL="0" indent="0" algn="ctr">
               <a:buNone/>
             </a:pPr>
             <a:r>
@@ -3223,7 +3001,7 @@
           <a:bodyPr wrap="square" lIns="0" tIns="0" rIns="0" bIns="0" rtlCol="0" anchor="ctr"/>
           <a:lstStyle/>
           <a:p>
-            <a:pPr indent="0" marL="0">
+            <a:pPr marL="0" indent="0">
               <a:buNone/>
             </a:pPr>
             <a:r>
@@ -3259,7 +3037,7 @@
           <a:bodyPr wrap="square" lIns="0" tIns="0" rIns="0" bIns="0" rtlCol="0" anchor="ctr"/>
           <a:lstStyle/>
           <a:p>
-            <a:pPr indent="0" marL="0">
+            <a:pPr marL="0" indent="0">
               <a:lnSpc>
                 <a:spcPct val="135000"/>
               </a:lnSpc>
@@ -3296,6 +3074,13 @@
           </a:solidFill>
           <a:ln/>
         </p:spPr>
+        <p:txBody>
+          <a:bodyPr/>
+          <a:lstStyle/>
+          <a:p>
+            <a:endParaRPr lang="fr-FR"/>
+          </a:p>
+        </p:txBody>
       </p:sp>
       <p:sp>
         <p:nvSpPr>
@@ -3318,7 +3103,7 @@
           <a:bodyPr wrap="square" lIns="0" tIns="0" rIns="0" bIns="0" rtlCol="0" anchor="ctr"/>
           <a:lstStyle/>
           <a:p>
-            <a:pPr indent="0" marL="0">
+            <a:pPr marL="0" indent="0">
               <a:buNone/>
             </a:pPr>
             <a:r>
@@ -3349,6 +3134,7 @@
         <a:solidFill>
           <a:srgbClr val="F0F6FF"/>
         </a:solidFill>
+        <a:effectLst/>
       </p:bgPr>
     </p:bg>
     <p:spTree>
@@ -3384,6 +3170,13 @@
           </a:solidFill>
           <a:ln/>
         </p:spPr>
+        <p:txBody>
+          <a:bodyPr/>
+          <a:lstStyle/>
+          <a:p>
+            <a:endParaRPr lang="fr-FR"/>
+          </a:p>
+        </p:txBody>
       </p:sp>
       <p:sp>
         <p:nvSpPr>
@@ -3406,11 +3199,11 @@
           <a:bodyPr wrap="square" lIns="0" tIns="0" rIns="0" bIns="0" rtlCol="0" anchor="ctr"/>
           <a:lstStyle/>
           <a:p>
-            <a:pPr indent="0" marL="0">
-              <a:buNone/>
-            </a:pPr>
-            <a:r>
-              <a:rPr lang="en-US" sz="1100" b="1" spc="300" kern="0" dirty="0">
+            <a:pPr marL="0" indent="0">
+              <a:buNone/>
+            </a:pPr>
+            <a:r>
+              <a:rPr lang="en-US" sz="1100" b="1" kern="0" spc="300" dirty="0">
                 <a:solidFill>
                   <a:srgbClr val="00B4D8"/>
                 </a:solidFill>
@@ -3442,7 +3235,7 @@
           <a:bodyPr wrap="square" lIns="0" tIns="0" rIns="0" bIns="0" rtlCol="0" anchor="ctr"/>
           <a:lstStyle/>
           <a:p>
-            <a:pPr indent="0" marL="0">
+            <a:pPr marL="0" indent="0">
               <a:buNone/>
             </a:pPr>
             <a:r>
@@ -3478,7 +3271,7 @@
           <a:bodyPr wrap="square" lIns="0" tIns="0" rIns="0" bIns="0" rtlCol="0" anchor="ctr"/>
           <a:lstStyle/>
           <a:p>
-            <a:pPr indent="0" marL="0">
+            <a:pPr marL="0" indent="0">
               <a:lnSpc>
                 <a:spcPct val="150000"/>
               </a:lnSpc>
@@ -3495,12 +3288,6 @@
               </a:rPr>
               <a:t>La rétinopathie diabétique </a:t>
             </a:r>
-            <a:pPr indent="0" marL="0">
-              <a:lnSpc>
-                <a:spcPct val="150000"/>
-              </a:lnSpc>
-              <a:buNone/>
-            </a:pPr>
             <a:r>
               <a:rPr lang="en-US" sz="1300" dirty="0">
                 <a:solidFill>
@@ -3537,7 +3324,7 @@
           <a:bodyPr wrap="square" lIns="0" tIns="0" rIns="0" bIns="0" rtlCol="0" anchor="ctr"/>
           <a:lstStyle/>
           <a:p>
-            <a:pPr indent="0" marL="0">
+            <a:pPr marL="0" indent="0">
               <a:buNone/>
             </a:pPr>
             <a:r>
@@ -3571,6 +3358,13 @@
           </a:solidFill>
           <a:ln/>
         </p:spPr>
+        <p:txBody>
+          <a:bodyPr/>
+          <a:lstStyle/>
+          <a:p>
+            <a:endParaRPr lang="fr-FR"/>
+          </a:p>
+        </p:txBody>
       </p:sp>
       <p:sp>
         <p:nvSpPr>
@@ -3593,7 +3387,7 @@
           <a:bodyPr wrap="square" rtlCol="0" anchor="ctr"/>
           <a:lstStyle/>
           <a:p>
-            <a:pPr indent="0" marL="0">
+            <a:pPr marL="0" indent="0">
               <a:buNone/>
             </a:pPr>
             <a:r>
@@ -3629,7 +3423,7 @@
           <a:bodyPr wrap="square" lIns="0" tIns="0" rIns="0" bIns="0" rtlCol="0" anchor="ctr"/>
           <a:lstStyle/>
           <a:p>
-            <a:pPr algn="r" indent="0" marL="0">
+            <a:pPr marL="0" indent="0" algn="r">
               <a:buNone/>
             </a:pPr>
             <a:r>
@@ -3663,6 +3457,13 @@
           </a:solidFill>
           <a:ln/>
         </p:spPr>
+        <p:txBody>
+          <a:bodyPr/>
+          <a:lstStyle/>
+          <a:p>
+            <a:endParaRPr lang="fr-FR"/>
+          </a:p>
+        </p:txBody>
       </p:sp>
       <p:sp>
         <p:nvSpPr>
@@ -3685,7 +3486,7 @@
           <a:bodyPr wrap="square" rtlCol="0" anchor="ctr"/>
           <a:lstStyle/>
           <a:p>
-            <a:pPr indent="0" marL="0">
+            <a:pPr marL="0" indent="0">
               <a:buNone/>
             </a:pPr>
             <a:r>
@@ -3721,7 +3522,7 @@
           <a:bodyPr wrap="square" lIns="0" tIns="0" rIns="0" bIns="0" rtlCol="0" anchor="ctr"/>
           <a:lstStyle/>
           <a:p>
-            <a:pPr algn="r" indent="0" marL="0">
+            <a:pPr marL="0" indent="0" algn="r">
               <a:buNone/>
             </a:pPr>
             <a:r>
@@ -3755,6 +3556,13 @@
           </a:solidFill>
           <a:ln/>
         </p:spPr>
+        <p:txBody>
+          <a:bodyPr/>
+          <a:lstStyle/>
+          <a:p>
+            <a:endParaRPr lang="fr-FR"/>
+          </a:p>
+        </p:txBody>
       </p:sp>
       <p:sp>
         <p:nvSpPr>
@@ -3777,7 +3585,7 @@
           <a:bodyPr wrap="square" rtlCol="0" anchor="ctr"/>
           <a:lstStyle/>
           <a:p>
-            <a:pPr indent="0" marL="0">
+            <a:pPr marL="0" indent="0">
               <a:buNone/>
             </a:pPr>
             <a:r>
@@ -3813,7 +3621,7 @@
           <a:bodyPr wrap="square" lIns="0" tIns="0" rIns="0" bIns="0" rtlCol="0" anchor="ctr"/>
           <a:lstStyle/>
           <a:p>
-            <a:pPr algn="r" indent="0" marL="0">
+            <a:pPr marL="0" indent="0" algn="r">
               <a:buNone/>
             </a:pPr>
             <a:r>
@@ -3847,6 +3655,13 @@
           </a:solidFill>
           <a:ln/>
         </p:spPr>
+        <p:txBody>
+          <a:bodyPr/>
+          <a:lstStyle/>
+          <a:p>
+            <a:endParaRPr lang="fr-FR"/>
+          </a:p>
+        </p:txBody>
       </p:sp>
       <p:sp>
         <p:nvSpPr>
@@ -3869,7 +3684,7 @@
           <a:bodyPr wrap="square" rtlCol="0" anchor="ctr"/>
           <a:lstStyle/>
           <a:p>
-            <a:pPr indent="0" marL="0">
+            <a:pPr marL="0" indent="0">
               <a:buNone/>
             </a:pPr>
             <a:r>
@@ -3905,7 +3720,7 @@
           <a:bodyPr wrap="square" lIns="0" tIns="0" rIns="0" bIns="0" rtlCol="0" anchor="ctr"/>
           <a:lstStyle/>
           <a:p>
-            <a:pPr algn="r" indent="0" marL="0">
+            <a:pPr marL="0" indent="0" algn="r">
               <a:buNone/>
             </a:pPr>
             <a:r>
@@ -3939,6 +3754,13 @@
           </a:solidFill>
           <a:ln/>
         </p:spPr>
+        <p:txBody>
+          <a:bodyPr/>
+          <a:lstStyle/>
+          <a:p>
+            <a:endParaRPr lang="fr-FR"/>
+          </a:p>
+        </p:txBody>
       </p:sp>
       <p:sp>
         <p:nvSpPr>
@@ -3961,7 +3783,7 @@
           <a:bodyPr wrap="square" rtlCol="0" anchor="ctr"/>
           <a:lstStyle/>
           <a:p>
-            <a:pPr indent="0" marL="0">
+            <a:pPr marL="0" indent="0">
               <a:buNone/>
             </a:pPr>
             <a:r>
@@ -3997,7 +3819,7 @@
           <a:bodyPr wrap="square" lIns="0" tIns="0" rIns="0" bIns="0" rtlCol="0" anchor="ctr"/>
           <a:lstStyle/>
           <a:p>
-            <a:pPr algn="r" indent="0" marL="0">
+            <a:pPr marL="0" indent="0" algn="r">
               <a:buNone/>
             </a:pPr>
             <a:r>
@@ -4036,13 +3858,20 @@
             <a:prstDash val="solid"/>
           </a:ln>
           <a:effectLst>
-            <a:outerShdw sx="100000" sy="100000" kx="0" ky="0" algn="bl" rotWithShape="0" blurRad="101600" dist="38100" dir="8100000">
+            <a:outerShdw blurRad="101600" dist="38100" dir="8100000" algn="bl" rotWithShape="0">
               <a:srgbClr val="000000">
                 <a:alpha val="12000"/>
               </a:srgbClr>
             </a:outerShdw>
           </a:effectLst>
         </p:spPr>
+        <p:txBody>
+          <a:bodyPr/>
+          <a:lstStyle/>
+          <a:p>
+            <a:endParaRPr lang="fr-FR"/>
+          </a:p>
+        </p:txBody>
       </p:sp>
       <p:sp>
         <p:nvSpPr>
@@ -4065,7 +3894,7 @@
           <a:bodyPr wrap="square" lIns="0" tIns="0" rIns="0" bIns="0" rtlCol="0" anchor="ctr"/>
           <a:lstStyle/>
           <a:p>
-            <a:pPr indent="0" marL="0">
+            <a:pPr marL="0" indent="0">
               <a:buNone/>
             </a:pPr>
             <a:r>
@@ -4101,7 +3930,7 @@
           <a:bodyPr wrap="square" lIns="0" tIns="0" rIns="0" bIns="0" rtlCol="0" anchor="ctr"/>
           <a:lstStyle/>
           <a:p>
-            <a:pPr indent="0" marL="0">
+            <a:pPr marL="0" indent="0">
               <a:buNone/>
             </a:pPr>
             <a:r>
@@ -4115,9 +3944,6 @@
               </a:rPr>
               <a:t>›  </a:t>
             </a:r>
-            <a:pPr indent="0" marL="0">
-              <a:buNone/>
-            </a:pPr>
             <a:r>
               <a:rPr lang="en-US" sz="1250" dirty="0">
                 <a:solidFill>
@@ -4154,7 +3980,7 @@
           <a:bodyPr wrap="square" lIns="0" tIns="0" rIns="0" bIns="0" rtlCol="0" anchor="ctr"/>
           <a:lstStyle/>
           <a:p>
-            <a:pPr indent="0" marL="0">
+            <a:pPr marL="0" indent="0">
               <a:buNone/>
             </a:pPr>
             <a:r>
@@ -4168,9 +3994,6 @@
               </a:rPr>
               <a:t>›  </a:t>
             </a:r>
-            <a:pPr indent="0" marL="0">
-              <a:buNone/>
-            </a:pPr>
             <a:r>
               <a:rPr lang="en-US" sz="1250" dirty="0">
                 <a:solidFill>
@@ -4207,7 +4030,7 @@
           <a:bodyPr wrap="square" lIns="0" tIns="0" rIns="0" bIns="0" rtlCol="0" anchor="ctr"/>
           <a:lstStyle/>
           <a:p>
-            <a:pPr indent="0" marL="0">
+            <a:pPr marL="0" indent="0">
               <a:buNone/>
             </a:pPr>
             <a:r>
@@ -4221,9 +4044,6 @@
               </a:rPr>
               <a:t>›  </a:t>
             </a:r>
-            <a:pPr indent="0" marL="0">
-              <a:buNone/>
-            </a:pPr>
             <a:r>
               <a:rPr lang="en-US" sz="1250" dirty="0">
                 <a:solidFill>
@@ -4260,7 +4080,7 @@
           <a:bodyPr wrap="square" lIns="0" tIns="0" rIns="0" bIns="0" rtlCol="0" anchor="ctr"/>
           <a:lstStyle/>
           <a:p>
-            <a:pPr indent="0" marL="0">
+            <a:pPr marL="0" indent="0">
               <a:buNone/>
             </a:pPr>
             <a:r>
@@ -4274,9 +4094,6 @@
               </a:rPr>
               <a:t>›  </a:t>
             </a:r>
-            <a:pPr indent="0" marL="0">
-              <a:buNone/>
-            </a:pPr>
             <a:r>
               <a:rPr lang="en-US" sz="1250" dirty="0">
                 <a:solidFill>
@@ -4308,6 +4125,7 @@
         <a:solidFill>
           <a:srgbClr val="0F172A"/>
         </a:solidFill>
+        <a:effectLst/>
       </p:bgPr>
     </p:bg>
     <p:spTree>
@@ -4343,6 +4161,13 @@
           </a:solidFill>
           <a:ln/>
         </p:spPr>
+        <p:txBody>
+          <a:bodyPr/>
+          <a:lstStyle/>
+          <a:p>
+            <a:endParaRPr lang="fr-FR"/>
+          </a:p>
+        </p:txBody>
       </p:sp>
       <p:sp>
         <p:nvSpPr>
@@ -4365,11 +4190,11 @@
           <a:bodyPr wrap="square" lIns="0" tIns="0" rIns="0" bIns="0" rtlCol="0" anchor="ctr"/>
           <a:lstStyle/>
           <a:p>
-            <a:pPr indent="0" marL="0">
-              <a:buNone/>
-            </a:pPr>
-            <a:r>
-              <a:rPr lang="en-US" sz="1100" b="1" spc="300" kern="0" dirty="0">
+            <a:pPr marL="0" indent="0">
+              <a:buNone/>
+            </a:pPr>
+            <a:r>
+              <a:rPr lang="en-US" sz="1100" b="1" kern="0" spc="300" dirty="0">
                 <a:solidFill>
                   <a:srgbClr val="00B4D8"/>
                 </a:solidFill>
@@ -4401,7 +4226,7 @@
           <a:bodyPr wrap="square" lIns="0" tIns="0" rIns="0" bIns="0" rtlCol="0" anchor="ctr"/>
           <a:lstStyle/>
           <a:p>
-            <a:pPr indent="0" marL="0">
+            <a:pPr marL="0" indent="0">
               <a:buNone/>
             </a:pPr>
             <a:r>
@@ -4440,13 +4265,20 @@
             <a:prstDash val="solid"/>
           </a:ln>
           <a:effectLst>
-            <a:outerShdw sx="100000" sy="100000" kx="0" ky="0" algn="bl" rotWithShape="0" blurRad="101600" dist="38100" dir="8100000">
+            <a:outerShdw blurRad="101600" dist="38100" dir="8100000" algn="bl" rotWithShape="0">
               <a:srgbClr val="000000">
                 <a:alpha val="12000"/>
               </a:srgbClr>
             </a:outerShdw>
           </a:effectLst>
         </p:spPr>
+        <p:txBody>
+          <a:bodyPr/>
+          <a:lstStyle/>
+          <a:p>
+            <a:endParaRPr lang="fr-FR"/>
+          </a:p>
+        </p:txBody>
       </p:sp>
       <p:sp>
         <p:nvSpPr>
@@ -4467,6 +4299,13 @@
           </a:solidFill>
           <a:ln/>
         </p:spPr>
+        <p:txBody>
+          <a:bodyPr/>
+          <a:lstStyle/>
+          <a:p>
+            <a:endParaRPr lang="fr-FR"/>
+          </a:p>
+        </p:txBody>
       </p:sp>
       <p:sp>
         <p:nvSpPr>
@@ -4489,7 +4328,7 @@
           <a:bodyPr wrap="square" lIns="0" tIns="0" rIns="0" bIns="0" rtlCol="0" anchor="ctr"/>
           <a:lstStyle/>
           <a:p>
-            <a:pPr algn="ctr" indent="0" marL="0">
+            <a:pPr marL="0" indent="0" algn="ctr">
               <a:buNone/>
             </a:pPr>
             <a:r>
@@ -4525,7 +4364,7 @@
           <a:bodyPr wrap="square" lIns="0" tIns="0" rIns="0" bIns="0" rtlCol="0" anchor="ctr"/>
           <a:lstStyle/>
           <a:p>
-            <a:pPr algn="r" indent="0" marL="0">
+            <a:pPr marL="0" indent="0" algn="r">
               <a:buNone/>
             </a:pPr>
             <a:r>
@@ -4561,7 +4400,7 @@
           <a:bodyPr wrap="square" lIns="0" tIns="0" rIns="0" bIns="0" rtlCol="0" anchor="ctr"/>
           <a:lstStyle/>
           <a:p>
-            <a:pPr indent="0" marL="0">
+            <a:pPr marL="0" indent="0">
               <a:buNone/>
             </a:pPr>
             <a:r>
@@ -4597,7 +4436,7 @@
           <a:bodyPr wrap="square" lIns="0" tIns="0" rIns="0" bIns="0" rtlCol="0" anchor="ctr"/>
           <a:lstStyle/>
           <a:p>
-            <a:pPr indent="0" marL="0">
+            <a:pPr marL="0" indent="0">
               <a:lnSpc>
                 <a:spcPct val="120000"/>
               </a:lnSpc>
@@ -4639,13 +4478,20 @@
             <a:prstDash val="solid"/>
           </a:ln>
           <a:effectLst>
-            <a:outerShdw sx="100000" sy="100000" kx="0" ky="0" algn="bl" rotWithShape="0" blurRad="101600" dist="38100" dir="8100000">
+            <a:outerShdw blurRad="101600" dist="38100" dir="8100000" algn="bl" rotWithShape="0">
               <a:srgbClr val="000000">
                 <a:alpha val="12000"/>
               </a:srgbClr>
             </a:outerShdw>
           </a:effectLst>
         </p:spPr>
+        <p:txBody>
+          <a:bodyPr/>
+          <a:lstStyle/>
+          <a:p>
+            <a:endParaRPr lang="fr-FR"/>
+          </a:p>
+        </p:txBody>
       </p:sp>
       <p:sp>
         <p:nvSpPr>
@@ -4666,6 +4512,13 @@
           </a:solidFill>
           <a:ln/>
         </p:spPr>
+        <p:txBody>
+          <a:bodyPr/>
+          <a:lstStyle/>
+          <a:p>
+            <a:endParaRPr lang="fr-FR"/>
+          </a:p>
+        </p:txBody>
       </p:sp>
       <p:sp>
         <p:nvSpPr>
@@ -4688,7 +4541,7 @@
           <a:bodyPr wrap="square" lIns="0" tIns="0" rIns="0" bIns="0" rtlCol="0" anchor="ctr"/>
           <a:lstStyle/>
           <a:p>
-            <a:pPr algn="ctr" indent="0" marL="0">
+            <a:pPr marL="0" indent="0" algn="ctr">
               <a:buNone/>
             </a:pPr>
             <a:r>
@@ -4724,7 +4577,7 @@
           <a:bodyPr wrap="square" lIns="0" tIns="0" rIns="0" bIns="0" rtlCol="0" anchor="ctr"/>
           <a:lstStyle/>
           <a:p>
-            <a:pPr algn="r" indent="0" marL="0">
+            <a:pPr marL="0" indent="0" algn="r">
               <a:buNone/>
             </a:pPr>
             <a:r>
@@ -4760,7 +4613,7 @@
           <a:bodyPr wrap="square" lIns="0" tIns="0" rIns="0" bIns="0" rtlCol="0" anchor="ctr"/>
           <a:lstStyle/>
           <a:p>
-            <a:pPr indent="0" marL="0">
+            <a:pPr marL="0" indent="0">
               <a:buNone/>
             </a:pPr>
             <a:r>
@@ -4796,7 +4649,7 @@
           <a:bodyPr wrap="square" lIns="0" tIns="0" rIns="0" bIns="0" rtlCol="0" anchor="ctr"/>
           <a:lstStyle/>
           <a:p>
-            <a:pPr indent="0" marL="0">
+            <a:pPr marL="0" indent="0">
               <a:lnSpc>
                 <a:spcPct val="120000"/>
               </a:lnSpc>
@@ -4838,13 +4691,20 @@
             <a:prstDash val="solid"/>
           </a:ln>
           <a:effectLst>
-            <a:outerShdw sx="100000" sy="100000" kx="0" ky="0" algn="bl" rotWithShape="0" blurRad="101600" dist="38100" dir="8100000">
+            <a:outerShdw blurRad="101600" dist="38100" dir="8100000" algn="bl" rotWithShape="0">
               <a:srgbClr val="000000">
                 <a:alpha val="12000"/>
               </a:srgbClr>
             </a:outerShdw>
           </a:effectLst>
         </p:spPr>
+        <p:txBody>
+          <a:bodyPr/>
+          <a:lstStyle/>
+          <a:p>
+            <a:endParaRPr lang="fr-FR"/>
+          </a:p>
+        </p:txBody>
       </p:sp>
       <p:sp>
         <p:nvSpPr>
@@ -4865,6 +4725,13 @@
           </a:solidFill>
           <a:ln/>
         </p:spPr>
+        <p:txBody>
+          <a:bodyPr/>
+          <a:lstStyle/>
+          <a:p>
+            <a:endParaRPr lang="fr-FR"/>
+          </a:p>
+        </p:txBody>
       </p:sp>
       <p:sp>
         <p:nvSpPr>
@@ -4887,7 +4754,7 @@
           <a:bodyPr wrap="square" lIns="0" tIns="0" rIns="0" bIns="0" rtlCol="0" anchor="ctr"/>
           <a:lstStyle/>
           <a:p>
-            <a:pPr algn="ctr" indent="0" marL="0">
+            <a:pPr marL="0" indent="0" algn="ctr">
               <a:buNone/>
             </a:pPr>
             <a:r>
@@ -4923,7 +4790,7 @@
           <a:bodyPr wrap="square" lIns="0" tIns="0" rIns="0" bIns="0" rtlCol="0" anchor="ctr"/>
           <a:lstStyle/>
           <a:p>
-            <a:pPr algn="r" indent="0" marL="0">
+            <a:pPr marL="0" indent="0" algn="r">
               <a:buNone/>
             </a:pPr>
             <a:r>
@@ -4959,7 +4826,7 @@
           <a:bodyPr wrap="square" lIns="0" tIns="0" rIns="0" bIns="0" rtlCol="0" anchor="ctr"/>
           <a:lstStyle/>
           <a:p>
-            <a:pPr indent="0" marL="0">
+            <a:pPr marL="0" indent="0">
               <a:buNone/>
             </a:pPr>
             <a:r>
@@ -4995,7 +4862,7 @@
           <a:bodyPr wrap="square" lIns="0" tIns="0" rIns="0" bIns="0" rtlCol="0" anchor="ctr"/>
           <a:lstStyle/>
           <a:p>
-            <a:pPr indent="0" marL="0">
+            <a:pPr marL="0" indent="0">
               <a:lnSpc>
                 <a:spcPct val="120000"/>
               </a:lnSpc>
@@ -5037,13 +4904,20 @@
             <a:prstDash val="solid"/>
           </a:ln>
           <a:effectLst>
-            <a:outerShdw sx="100000" sy="100000" kx="0" ky="0" algn="bl" rotWithShape="0" blurRad="101600" dist="38100" dir="8100000">
+            <a:outerShdw blurRad="101600" dist="38100" dir="8100000" algn="bl" rotWithShape="0">
               <a:srgbClr val="000000">
                 <a:alpha val="12000"/>
               </a:srgbClr>
             </a:outerShdw>
           </a:effectLst>
         </p:spPr>
+        <p:txBody>
+          <a:bodyPr/>
+          <a:lstStyle/>
+          <a:p>
+            <a:endParaRPr lang="fr-FR"/>
+          </a:p>
+        </p:txBody>
       </p:sp>
       <p:sp>
         <p:nvSpPr>
@@ -5064,6 +4938,13 @@
           </a:solidFill>
           <a:ln/>
         </p:spPr>
+        <p:txBody>
+          <a:bodyPr/>
+          <a:lstStyle/>
+          <a:p>
+            <a:endParaRPr lang="fr-FR"/>
+          </a:p>
+        </p:txBody>
       </p:sp>
       <p:sp>
         <p:nvSpPr>
@@ -5086,7 +4967,7 @@
           <a:bodyPr wrap="square" lIns="0" tIns="0" rIns="0" bIns="0" rtlCol="0" anchor="ctr"/>
           <a:lstStyle/>
           <a:p>
-            <a:pPr algn="ctr" indent="0" marL="0">
+            <a:pPr marL="0" indent="0" algn="ctr">
               <a:buNone/>
             </a:pPr>
             <a:r>
@@ -5122,7 +5003,7 @@
           <a:bodyPr wrap="square" lIns="0" tIns="0" rIns="0" bIns="0" rtlCol="0" anchor="ctr"/>
           <a:lstStyle/>
           <a:p>
-            <a:pPr algn="r" indent="0" marL="0">
+            <a:pPr marL="0" indent="0" algn="r">
               <a:buNone/>
             </a:pPr>
             <a:r>
@@ -5158,7 +5039,7 @@
           <a:bodyPr wrap="square" lIns="0" tIns="0" rIns="0" bIns="0" rtlCol="0" anchor="ctr"/>
           <a:lstStyle/>
           <a:p>
-            <a:pPr indent="0" marL="0">
+            <a:pPr marL="0" indent="0">
               <a:buNone/>
             </a:pPr>
             <a:r>
@@ -5194,7 +5075,7 @@
           <a:bodyPr wrap="square" lIns="0" tIns="0" rIns="0" bIns="0" rtlCol="0" anchor="ctr"/>
           <a:lstStyle/>
           <a:p>
-            <a:pPr indent="0" marL="0">
+            <a:pPr marL="0" indent="0">
               <a:lnSpc>
                 <a:spcPct val="120000"/>
               </a:lnSpc>
@@ -5236,13 +5117,20 @@
             <a:prstDash val="solid"/>
           </a:ln>
           <a:effectLst>
-            <a:outerShdw sx="100000" sy="100000" kx="0" ky="0" algn="bl" rotWithShape="0" blurRad="101600" dist="38100" dir="8100000">
+            <a:outerShdw blurRad="101600" dist="38100" dir="8100000" algn="bl" rotWithShape="0">
               <a:srgbClr val="000000">
                 <a:alpha val="12000"/>
               </a:srgbClr>
             </a:outerShdw>
           </a:effectLst>
         </p:spPr>
+        <p:txBody>
+          <a:bodyPr/>
+          <a:lstStyle/>
+          <a:p>
+            <a:endParaRPr lang="fr-FR"/>
+          </a:p>
+        </p:txBody>
       </p:sp>
       <p:sp>
         <p:nvSpPr>
@@ -5263,6 +5151,13 @@
           </a:solidFill>
           <a:ln/>
         </p:spPr>
+        <p:txBody>
+          <a:bodyPr/>
+          <a:lstStyle/>
+          <a:p>
+            <a:endParaRPr lang="fr-FR"/>
+          </a:p>
+        </p:txBody>
       </p:sp>
       <p:sp>
         <p:nvSpPr>
@@ -5285,7 +5180,7 @@
           <a:bodyPr wrap="square" lIns="0" tIns="0" rIns="0" bIns="0" rtlCol="0" anchor="ctr"/>
           <a:lstStyle/>
           <a:p>
-            <a:pPr algn="ctr" indent="0" marL="0">
+            <a:pPr marL="0" indent="0" algn="ctr">
               <a:buNone/>
             </a:pPr>
             <a:r>
@@ -5321,7 +5216,7 @@
           <a:bodyPr wrap="square" lIns="0" tIns="0" rIns="0" bIns="0" rtlCol="0" anchor="ctr"/>
           <a:lstStyle/>
           <a:p>
-            <a:pPr algn="r" indent="0" marL="0">
+            <a:pPr marL="0" indent="0" algn="r">
               <a:buNone/>
             </a:pPr>
             <a:r>
@@ -5357,7 +5252,7 @@
           <a:bodyPr wrap="square" lIns="0" tIns="0" rIns="0" bIns="0" rtlCol="0" anchor="ctr"/>
           <a:lstStyle/>
           <a:p>
-            <a:pPr indent="0" marL="0">
+            <a:pPr marL="0" indent="0">
               <a:buNone/>
             </a:pPr>
             <a:r>
@@ -5393,7 +5288,7 @@
           <a:bodyPr wrap="square" lIns="0" tIns="0" rIns="0" bIns="0" rtlCol="0" anchor="ctr"/>
           <a:lstStyle/>
           <a:p>
-            <a:pPr indent="0" marL="0">
+            <a:pPr marL="0" indent="0">
               <a:lnSpc>
                 <a:spcPct val="120000"/>
               </a:lnSpc>
@@ -5435,13 +5330,20 @@
             <a:prstDash val="solid"/>
           </a:ln>
           <a:effectLst>
-            <a:outerShdw sx="100000" sy="100000" kx="0" ky="0" algn="bl" rotWithShape="0" blurRad="101600" dist="38100" dir="8100000">
+            <a:outerShdw blurRad="101600" dist="38100" dir="8100000" algn="bl" rotWithShape="0">
               <a:srgbClr val="000000">
                 <a:alpha val="12000"/>
               </a:srgbClr>
             </a:outerShdw>
           </a:effectLst>
         </p:spPr>
+        <p:txBody>
+          <a:bodyPr/>
+          <a:lstStyle/>
+          <a:p>
+            <a:endParaRPr lang="fr-FR"/>
+          </a:p>
+        </p:txBody>
       </p:sp>
       <p:sp>
         <p:nvSpPr>
@@ -5462,6 +5364,13 @@
           </a:solidFill>
           <a:ln/>
         </p:spPr>
+        <p:txBody>
+          <a:bodyPr/>
+          <a:lstStyle/>
+          <a:p>
+            <a:endParaRPr lang="fr-FR"/>
+          </a:p>
+        </p:txBody>
       </p:sp>
       <p:sp>
         <p:nvSpPr>
@@ -5484,7 +5393,7 @@
           <a:bodyPr wrap="square" lIns="0" tIns="0" rIns="0" bIns="0" rtlCol="0" anchor="ctr"/>
           <a:lstStyle/>
           <a:p>
-            <a:pPr algn="ctr" indent="0" marL="0">
+            <a:pPr marL="0" indent="0" algn="ctr">
               <a:buNone/>
             </a:pPr>
             <a:r>
@@ -5520,7 +5429,7 @@
           <a:bodyPr wrap="square" lIns="0" tIns="0" rIns="0" bIns="0" rtlCol="0" anchor="ctr"/>
           <a:lstStyle/>
           <a:p>
-            <a:pPr algn="r" indent="0" marL="0">
+            <a:pPr marL="0" indent="0" algn="r">
               <a:buNone/>
             </a:pPr>
             <a:r>
@@ -5556,7 +5465,7 @@
           <a:bodyPr wrap="square" lIns="0" tIns="0" rIns="0" bIns="0" rtlCol="0" anchor="ctr"/>
           <a:lstStyle/>
           <a:p>
-            <a:pPr indent="0" marL="0">
+            <a:pPr marL="0" indent="0">
               <a:buNone/>
             </a:pPr>
             <a:r>
@@ -5592,7 +5501,7 @@
           <a:bodyPr wrap="square" lIns="0" tIns="0" rIns="0" bIns="0" rtlCol="0" anchor="ctr"/>
           <a:lstStyle/>
           <a:p>
-            <a:pPr indent="0" marL="0">
+            <a:pPr marL="0" indent="0">
               <a:lnSpc>
                 <a:spcPct val="120000"/>
               </a:lnSpc>
@@ -5629,6 +5538,13 @@
           </a:solidFill>
           <a:ln/>
         </p:spPr>
+        <p:txBody>
+          <a:bodyPr/>
+          <a:lstStyle/>
+          <a:p>
+            <a:endParaRPr lang="fr-FR"/>
+          </a:p>
+        </p:txBody>
       </p:sp>
       <p:sp>
         <p:nvSpPr>
@@ -5651,7 +5567,7 @@
           <a:bodyPr wrap="square" lIns="0" tIns="0" rIns="0" bIns="0" rtlCol="0" anchor="ctr"/>
           <a:lstStyle/>
           <a:p>
-            <a:pPr algn="ctr" indent="0" marL="0">
+            <a:pPr marL="0" indent="0" algn="ctr">
               <a:buNone/>
             </a:pPr>
             <a:r>
@@ -5682,6 +5598,7 @@
         <a:solidFill>
           <a:srgbClr val="F0F6FF"/>
         </a:solidFill>
+        <a:effectLst/>
       </p:bgPr>
     </p:bg>
     <p:spTree>
@@ -5717,6 +5634,13 @@
           </a:solidFill>
           <a:ln/>
         </p:spPr>
+        <p:txBody>
+          <a:bodyPr/>
+          <a:lstStyle/>
+          <a:p>
+            <a:endParaRPr lang="fr-FR"/>
+          </a:p>
+        </p:txBody>
       </p:sp>
       <p:sp>
         <p:nvSpPr>
@@ -5739,11 +5663,11 @@
           <a:bodyPr wrap="square" lIns="0" tIns="0" rIns="0" bIns="0" rtlCol="0" anchor="ctr"/>
           <a:lstStyle/>
           <a:p>
-            <a:pPr indent="0" marL="0">
-              <a:buNone/>
-            </a:pPr>
-            <a:r>
-              <a:rPr lang="en-US" sz="1100" b="1" spc="300" kern="0" dirty="0">
+            <a:pPr marL="0" indent="0">
+              <a:buNone/>
+            </a:pPr>
+            <a:r>
+              <a:rPr lang="en-US" sz="1100" b="1" kern="0" spc="300" dirty="0">
                 <a:solidFill>
                   <a:srgbClr val="00B4D8"/>
                 </a:solidFill>
@@ -5775,7 +5699,7 @@
           <a:bodyPr wrap="square" lIns="0" tIns="0" rIns="0" bIns="0" rtlCol="0" anchor="ctr"/>
           <a:lstStyle/>
           <a:p>
-            <a:pPr indent="0" marL="0">
+            <a:pPr marL="0" indent="0">
               <a:buNone/>
             </a:pPr>
             <a:r>
@@ -5809,13 +5733,20 @@
           </a:solidFill>
           <a:ln/>
           <a:effectLst>
-            <a:outerShdw sx="100000" sy="100000" kx="0" ky="0" algn="bl" rotWithShape="0" blurRad="101600" dist="38100" dir="8100000">
+            <a:outerShdw blurRad="101600" dist="38100" dir="8100000" algn="bl" rotWithShape="0">
               <a:srgbClr val="000000">
                 <a:alpha val="12000"/>
               </a:srgbClr>
             </a:outerShdw>
           </a:effectLst>
         </p:spPr>
+        <p:txBody>
+          <a:bodyPr/>
+          <a:lstStyle/>
+          <a:p>
+            <a:endParaRPr lang="fr-FR"/>
+          </a:p>
+        </p:txBody>
       </p:sp>
       <p:sp>
         <p:nvSpPr>
@@ -5836,6 +5767,13 @@
           </a:solidFill>
           <a:ln/>
         </p:spPr>
+        <p:txBody>
+          <a:bodyPr/>
+          <a:lstStyle/>
+          <a:p>
+            <a:endParaRPr lang="fr-FR"/>
+          </a:p>
+        </p:txBody>
       </p:sp>
       <p:sp>
         <p:nvSpPr>
@@ -5858,7 +5796,7 @@
           <a:bodyPr wrap="square" lIns="0" tIns="0" rIns="0" bIns="0" rtlCol="0" anchor="ctr"/>
           <a:lstStyle/>
           <a:p>
-            <a:pPr indent="0" marL="0">
+            <a:pPr marL="0" indent="0">
               <a:buNone/>
             </a:pPr>
             <a:r>
@@ -5892,6 +5830,13 @@
           </a:solidFill>
           <a:ln/>
         </p:spPr>
+        <p:txBody>
+          <a:bodyPr/>
+          <a:lstStyle/>
+          <a:p>
+            <a:endParaRPr lang="fr-FR"/>
+          </a:p>
+        </p:txBody>
       </p:sp>
       <p:sp>
         <p:nvSpPr>
@@ -5914,7 +5859,7 @@
           <a:bodyPr wrap="square" lIns="0" tIns="0" rIns="0" bIns="0" rtlCol="0" anchor="ctr"/>
           <a:lstStyle/>
           <a:p>
-            <a:pPr indent="0" marL="0">
+            <a:pPr marL="0" indent="0">
               <a:buNone/>
             </a:pPr>
             <a:r>
@@ -5950,7 +5895,7 @@
           <a:bodyPr wrap="square" lIns="0" tIns="0" rIns="0" bIns="0" rtlCol="0" anchor="ctr"/>
           <a:lstStyle/>
           <a:p>
-            <a:pPr indent="0" marL="0">
+            <a:pPr marL="0" indent="0">
               <a:buNone/>
             </a:pPr>
             <a:r>
@@ -5984,6 +5929,13 @@
           </a:solidFill>
           <a:ln/>
         </p:spPr>
+        <p:txBody>
+          <a:bodyPr/>
+          <a:lstStyle/>
+          <a:p>
+            <a:endParaRPr lang="fr-FR"/>
+          </a:p>
+        </p:txBody>
       </p:sp>
       <p:sp>
         <p:nvSpPr>
@@ -6006,7 +5958,7 @@
           <a:bodyPr wrap="square" lIns="0" tIns="0" rIns="0" bIns="0" rtlCol="0" anchor="ctr"/>
           <a:lstStyle/>
           <a:p>
-            <a:pPr indent="0" marL="0">
+            <a:pPr marL="0" indent="0">
               <a:buNone/>
             </a:pPr>
             <a:r>
@@ -6042,7 +5994,7 @@
           <a:bodyPr wrap="square" lIns="0" tIns="0" rIns="0" bIns="0" rtlCol="0" anchor="ctr"/>
           <a:lstStyle/>
           <a:p>
-            <a:pPr indent="0" marL="0">
+            <a:pPr marL="0" indent="0">
               <a:buNone/>
             </a:pPr>
             <a:r>
@@ -6076,6 +6028,13 @@
           </a:solidFill>
           <a:ln/>
         </p:spPr>
+        <p:txBody>
+          <a:bodyPr/>
+          <a:lstStyle/>
+          <a:p>
+            <a:endParaRPr lang="fr-FR"/>
+          </a:p>
+        </p:txBody>
       </p:sp>
       <p:sp>
         <p:nvSpPr>
@@ -6098,7 +6057,7 @@
           <a:bodyPr wrap="square" lIns="0" tIns="0" rIns="0" bIns="0" rtlCol="0" anchor="ctr"/>
           <a:lstStyle/>
           <a:p>
-            <a:pPr indent="0" marL="0">
+            <a:pPr marL="0" indent="0">
               <a:buNone/>
             </a:pPr>
             <a:r>
@@ -6134,7 +6093,7 @@
           <a:bodyPr wrap="square" lIns="0" tIns="0" rIns="0" bIns="0" rtlCol="0" anchor="ctr"/>
           <a:lstStyle/>
           <a:p>
-            <a:pPr indent="0" marL="0">
+            <a:pPr marL="0" indent="0">
               <a:buNone/>
             </a:pPr>
             <a:r>
@@ -6168,6 +6127,13 @@
           </a:solidFill>
           <a:ln/>
         </p:spPr>
+        <p:txBody>
+          <a:bodyPr/>
+          <a:lstStyle/>
+          <a:p>
+            <a:endParaRPr lang="fr-FR"/>
+          </a:p>
+        </p:txBody>
       </p:sp>
       <p:sp>
         <p:nvSpPr>
@@ -6190,7 +6156,7 @@
           <a:bodyPr wrap="square" lIns="0" tIns="0" rIns="0" bIns="0" rtlCol="0" anchor="ctr"/>
           <a:lstStyle/>
           <a:p>
-            <a:pPr indent="0" marL="0">
+            <a:pPr marL="0" indent="0">
               <a:buNone/>
             </a:pPr>
             <a:r>
@@ -6226,7 +6192,7 @@
           <a:bodyPr wrap="square" lIns="0" tIns="0" rIns="0" bIns="0" rtlCol="0" anchor="ctr"/>
           <a:lstStyle/>
           <a:p>
-            <a:pPr indent="0" marL="0">
+            <a:pPr marL="0" indent="0">
               <a:buNone/>
             </a:pPr>
             <a:r>
@@ -6260,6 +6226,13 @@
           </a:solidFill>
           <a:ln/>
         </p:spPr>
+        <p:txBody>
+          <a:bodyPr/>
+          <a:lstStyle/>
+          <a:p>
+            <a:endParaRPr lang="fr-FR"/>
+          </a:p>
+        </p:txBody>
       </p:sp>
       <p:sp>
         <p:nvSpPr>
@@ -6282,7 +6255,7 @@
           <a:bodyPr wrap="square" lIns="0" tIns="0" rIns="0" bIns="0" rtlCol="0" anchor="ctr"/>
           <a:lstStyle/>
           <a:p>
-            <a:pPr indent="0" marL="0">
+            <a:pPr marL="0" indent="0">
               <a:buNone/>
             </a:pPr>
             <a:r>
@@ -6318,7 +6291,7 @@
           <a:bodyPr wrap="square" lIns="0" tIns="0" rIns="0" bIns="0" rtlCol="0" anchor="ctr"/>
           <a:lstStyle/>
           <a:p>
-            <a:pPr indent="0" marL="0">
+            <a:pPr marL="0" indent="0">
               <a:buNone/>
             </a:pPr>
             <a:r>
@@ -6352,6 +6325,13 @@
           </a:solidFill>
           <a:ln/>
         </p:spPr>
+        <p:txBody>
+          <a:bodyPr/>
+          <a:lstStyle/>
+          <a:p>
+            <a:endParaRPr lang="fr-FR"/>
+          </a:p>
+        </p:txBody>
       </p:sp>
       <p:sp>
         <p:nvSpPr>
@@ -6374,7 +6354,7 @@
           <a:bodyPr wrap="square" lIns="0" tIns="0" rIns="0" bIns="0" rtlCol="0" anchor="ctr"/>
           <a:lstStyle/>
           <a:p>
-            <a:pPr indent="0" marL="0">
+            <a:pPr marL="0" indent="0">
               <a:buNone/>
             </a:pPr>
             <a:r>
@@ -6410,7 +6390,7 @@
           <a:bodyPr wrap="square" lIns="0" tIns="0" rIns="0" bIns="0" rtlCol="0" anchor="ctr"/>
           <a:lstStyle/>
           <a:p>
-            <a:pPr indent="0" marL="0">
+            <a:pPr marL="0" indent="0">
               <a:buNone/>
             </a:pPr>
             <a:r>
@@ -6444,13 +6424,20 @@
           </a:solidFill>
           <a:ln/>
           <a:effectLst>
-            <a:outerShdw sx="100000" sy="100000" kx="0" ky="0" algn="bl" rotWithShape="0" blurRad="101600" dist="38100" dir="8100000">
+            <a:outerShdw blurRad="101600" dist="38100" dir="8100000" algn="bl" rotWithShape="0">
               <a:srgbClr val="000000">
                 <a:alpha val="12000"/>
               </a:srgbClr>
             </a:outerShdw>
           </a:effectLst>
         </p:spPr>
+        <p:txBody>
+          <a:bodyPr/>
+          <a:lstStyle/>
+          <a:p>
+            <a:endParaRPr lang="fr-FR"/>
+          </a:p>
+        </p:txBody>
       </p:sp>
       <p:sp>
         <p:nvSpPr>
@@ -6471,6 +6458,13 @@
           </a:solidFill>
           <a:ln/>
         </p:spPr>
+        <p:txBody>
+          <a:bodyPr/>
+          <a:lstStyle/>
+          <a:p>
+            <a:endParaRPr lang="fr-FR"/>
+          </a:p>
+        </p:txBody>
       </p:sp>
       <p:sp>
         <p:nvSpPr>
@@ -6493,7 +6487,7 @@
           <a:bodyPr wrap="square" lIns="0" tIns="0" rIns="0" bIns="0" rtlCol="0" anchor="ctr"/>
           <a:lstStyle/>
           <a:p>
-            <a:pPr indent="0" marL="0">
+            <a:pPr marL="0" indent="0">
               <a:buNone/>
             </a:pPr>
             <a:r>
@@ -6527,6 +6521,13 @@
           </a:solidFill>
           <a:ln/>
         </p:spPr>
+        <p:txBody>
+          <a:bodyPr/>
+          <a:lstStyle/>
+          <a:p>
+            <a:endParaRPr lang="fr-FR"/>
+          </a:p>
+        </p:txBody>
       </p:sp>
       <p:sp>
         <p:nvSpPr>
@@ -6549,7 +6550,7 @@
           <a:bodyPr wrap="square" lIns="0" tIns="0" rIns="0" bIns="0" rtlCol="0" anchor="ctr"/>
           <a:lstStyle/>
           <a:p>
-            <a:pPr indent="0" marL="0">
+            <a:pPr marL="0" indent="0">
               <a:buNone/>
             </a:pPr>
             <a:r>
@@ -6585,7 +6586,7 @@
           <a:bodyPr wrap="square" lIns="0" tIns="0" rIns="0" bIns="0" rtlCol="0" anchor="ctr"/>
           <a:lstStyle/>
           <a:p>
-            <a:pPr indent="0" marL="0">
+            <a:pPr marL="0" indent="0">
               <a:buNone/>
             </a:pPr>
             <a:r>
@@ -6619,6 +6620,13 @@
           </a:solidFill>
           <a:ln/>
         </p:spPr>
+        <p:txBody>
+          <a:bodyPr/>
+          <a:lstStyle/>
+          <a:p>
+            <a:endParaRPr lang="fr-FR"/>
+          </a:p>
+        </p:txBody>
       </p:sp>
       <p:sp>
         <p:nvSpPr>
@@ -6641,7 +6649,7 @@
           <a:bodyPr wrap="square" lIns="0" tIns="0" rIns="0" bIns="0" rtlCol="0" anchor="ctr"/>
           <a:lstStyle/>
           <a:p>
-            <a:pPr indent="0" marL="0">
+            <a:pPr marL="0" indent="0">
               <a:buNone/>
             </a:pPr>
             <a:r>
@@ -6677,7 +6685,7 @@
           <a:bodyPr wrap="square" lIns="0" tIns="0" rIns="0" bIns="0" rtlCol="0" anchor="ctr"/>
           <a:lstStyle/>
           <a:p>
-            <a:pPr indent="0" marL="0">
+            <a:pPr marL="0" indent="0">
               <a:buNone/>
             </a:pPr>
             <a:r>
@@ -6711,6 +6719,13 @@
           </a:solidFill>
           <a:ln/>
         </p:spPr>
+        <p:txBody>
+          <a:bodyPr/>
+          <a:lstStyle/>
+          <a:p>
+            <a:endParaRPr lang="fr-FR"/>
+          </a:p>
+        </p:txBody>
       </p:sp>
       <p:sp>
         <p:nvSpPr>
@@ -6733,7 +6748,7 @@
           <a:bodyPr wrap="square" lIns="0" tIns="0" rIns="0" bIns="0" rtlCol="0" anchor="ctr"/>
           <a:lstStyle/>
           <a:p>
-            <a:pPr indent="0" marL="0">
+            <a:pPr marL="0" indent="0">
               <a:buNone/>
             </a:pPr>
             <a:r>
@@ -6769,7 +6784,7 @@
           <a:bodyPr wrap="square" lIns="0" tIns="0" rIns="0" bIns="0" rtlCol="0" anchor="ctr"/>
           <a:lstStyle/>
           <a:p>
-            <a:pPr indent="0" marL="0">
+            <a:pPr marL="0" indent="0">
               <a:buNone/>
             </a:pPr>
             <a:r>
@@ -6803,6 +6818,13 @@
           </a:solidFill>
           <a:ln/>
         </p:spPr>
+        <p:txBody>
+          <a:bodyPr/>
+          <a:lstStyle/>
+          <a:p>
+            <a:endParaRPr lang="fr-FR"/>
+          </a:p>
+        </p:txBody>
       </p:sp>
       <p:sp>
         <p:nvSpPr>
@@ -6825,7 +6847,7 @@
           <a:bodyPr wrap="square" lIns="0" tIns="0" rIns="0" bIns="0" rtlCol="0" anchor="ctr"/>
           <a:lstStyle/>
           <a:p>
-            <a:pPr indent="0" marL="0">
+            <a:pPr marL="0" indent="0">
               <a:buNone/>
             </a:pPr>
             <a:r>
@@ -6861,7 +6883,7 @@
           <a:bodyPr wrap="square" lIns="0" tIns="0" rIns="0" bIns="0" rtlCol="0" anchor="ctr"/>
           <a:lstStyle/>
           <a:p>
-            <a:pPr indent="0" marL="0">
+            <a:pPr marL="0" indent="0">
               <a:buNone/>
             </a:pPr>
             <a:r>
@@ -6895,6 +6917,13 @@
           </a:solidFill>
           <a:ln/>
         </p:spPr>
+        <p:txBody>
+          <a:bodyPr/>
+          <a:lstStyle/>
+          <a:p>
+            <a:endParaRPr lang="fr-FR"/>
+          </a:p>
+        </p:txBody>
       </p:sp>
       <p:sp>
         <p:nvSpPr>
@@ -6917,7 +6946,7 @@
           <a:bodyPr wrap="square" lIns="0" tIns="0" rIns="0" bIns="0" rtlCol="0" anchor="ctr"/>
           <a:lstStyle/>
           <a:p>
-            <a:pPr indent="0" marL="0">
+            <a:pPr marL="0" indent="0">
               <a:buNone/>
             </a:pPr>
             <a:r>
@@ -6953,7 +6982,7 @@
           <a:bodyPr wrap="square" lIns="0" tIns="0" rIns="0" bIns="0" rtlCol="0" anchor="ctr"/>
           <a:lstStyle/>
           <a:p>
-            <a:pPr indent="0" marL="0">
+            <a:pPr marL="0" indent="0">
               <a:buNone/>
             </a:pPr>
             <a:r>
@@ -6987,6 +7016,13 @@
           </a:solidFill>
           <a:ln/>
         </p:spPr>
+        <p:txBody>
+          <a:bodyPr/>
+          <a:lstStyle/>
+          <a:p>
+            <a:endParaRPr lang="fr-FR"/>
+          </a:p>
+        </p:txBody>
       </p:sp>
       <p:sp>
         <p:nvSpPr>
@@ -7009,7 +7045,7 @@
           <a:bodyPr wrap="square" lIns="0" tIns="0" rIns="0" bIns="0" rtlCol="0" anchor="ctr"/>
           <a:lstStyle/>
           <a:p>
-            <a:pPr indent="0" marL="0">
+            <a:pPr marL="0" indent="0">
               <a:buNone/>
             </a:pPr>
             <a:r>
@@ -7045,7 +7081,7 @@
           <a:bodyPr wrap="square" lIns="0" tIns="0" rIns="0" bIns="0" rtlCol="0" anchor="ctr"/>
           <a:lstStyle/>
           <a:p>
-            <a:pPr indent="0" marL="0">
+            <a:pPr marL="0" indent="0">
               <a:buNone/>
             </a:pPr>
             <a:r>
@@ -7076,6 +7112,7 @@
         <a:solidFill>
           <a:srgbClr val="F0F6FF"/>
         </a:solidFill>
+        <a:effectLst/>
       </p:bgPr>
     </p:bg>
     <p:spTree>
@@ -7111,6 +7148,13 @@
           </a:solidFill>
           <a:ln/>
         </p:spPr>
+        <p:txBody>
+          <a:bodyPr/>
+          <a:lstStyle/>
+          <a:p>
+            <a:endParaRPr lang="fr-FR"/>
+          </a:p>
+        </p:txBody>
       </p:sp>
       <p:sp>
         <p:nvSpPr>
@@ -7133,11 +7177,11 @@
           <a:bodyPr wrap="square" lIns="0" tIns="0" rIns="0" bIns="0" rtlCol="0" anchor="ctr"/>
           <a:lstStyle/>
           <a:p>
-            <a:pPr indent="0" marL="0">
-              <a:buNone/>
-            </a:pPr>
-            <a:r>
-              <a:rPr lang="en-US" sz="1100" b="1" spc="300" kern="0" dirty="0">
+            <a:pPr marL="0" indent="0">
+              <a:buNone/>
+            </a:pPr>
+            <a:r>
+              <a:rPr lang="en-US" sz="1100" b="1" kern="0" spc="300" dirty="0">
                 <a:solidFill>
                   <a:srgbClr val="00B4D8"/>
                 </a:solidFill>
@@ -7169,7 +7213,7 @@
           <a:bodyPr wrap="square" lIns="0" tIns="0" rIns="0" bIns="0" rtlCol="0" anchor="ctr"/>
           <a:lstStyle/>
           <a:p>
-            <a:pPr indent="0" marL="0">
+            <a:pPr marL="0" indent="0">
               <a:buNone/>
             </a:pPr>
             <a:r>
@@ -7205,7 +7249,7 @@
           <a:bodyPr wrap="square" lIns="0" tIns="0" rIns="0" bIns="0" rtlCol="0" anchor="ctr"/>
           <a:lstStyle/>
           <a:p>
-            <a:pPr indent="0" marL="0">
+            <a:pPr marL="0" indent="0">
               <a:buNone/>
             </a:pPr>
             <a:r>
@@ -7239,13 +7283,20 @@
           </a:solidFill>
           <a:ln/>
           <a:effectLst>
-            <a:outerShdw sx="100000" sy="100000" kx="0" ky="0" algn="bl" rotWithShape="0" blurRad="101600" dist="38100" dir="8100000">
+            <a:outerShdw blurRad="101600" dist="38100" dir="8100000" algn="bl" rotWithShape="0">
               <a:srgbClr val="000000">
                 <a:alpha val="12000"/>
               </a:srgbClr>
             </a:outerShdw>
           </a:effectLst>
         </p:spPr>
+        <p:txBody>
+          <a:bodyPr/>
+          <a:lstStyle/>
+          <a:p>
+            <a:endParaRPr lang="fr-FR"/>
+          </a:p>
+        </p:txBody>
       </p:sp>
       <p:sp>
         <p:nvSpPr>
@@ -7268,7 +7319,7 @@
           <a:bodyPr wrap="square" lIns="0" tIns="0" rIns="0" bIns="0" rtlCol="0" anchor="ctr"/>
           <a:lstStyle/>
           <a:p>
-            <a:pPr algn="ctr" indent="0" marL="0">
+            <a:pPr marL="0" indent="0" algn="ctr">
               <a:buNone/>
             </a:pPr>
             <a:r>
@@ -7304,7 +7355,7 @@
           <a:bodyPr wrap="square" lIns="0" tIns="0" rIns="0" bIns="0" rtlCol="0" anchor="ctr"/>
           <a:lstStyle/>
           <a:p>
-            <a:pPr algn="ctr" indent="0" marL="0">
+            <a:pPr marL="0" indent="0" algn="ctr">
               <a:lnSpc>
                 <a:spcPct val="110000"/>
               </a:lnSpc>
@@ -7341,13 +7392,20 @@
           </a:solidFill>
           <a:ln/>
           <a:effectLst>
-            <a:outerShdw sx="100000" sy="100000" kx="0" ky="0" algn="bl" rotWithShape="0" blurRad="101600" dist="38100" dir="8100000">
+            <a:outerShdw blurRad="101600" dist="38100" dir="8100000" algn="bl" rotWithShape="0">
               <a:srgbClr val="000000">
                 <a:alpha val="12000"/>
               </a:srgbClr>
             </a:outerShdw>
           </a:effectLst>
         </p:spPr>
+        <p:txBody>
+          <a:bodyPr/>
+          <a:lstStyle/>
+          <a:p>
+            <a:endParaRPr lang="fr-FR"/>
+          </a:p>
+        </p:txBody>
       </p:sp>
       <p:sp>
         <p:nvSpPr>
@@ -7370,7 +7428,7 @@
           <a:bodyPr wrap="square" lIns="0" tIns="0" rIns="0" bIns="0" rtlCol="0" anchor="ctr"/>
           <a:lstStyle/>
           <a:p>
-            <a:pPr algn="ctr" indent="0" marL="0">
+            <a:pPr marL="0" indent="0" algn="ctr">
               <a:buNone/>
             </a:pPr>
             <a:r>
@@ -7406,7 +7464,7 @@
           <a:bodyPr wrap="square" lIns="0" tIns="0" rIns="0" bIns="0" rtlCol="0" anchor="ctr"/>
           <a:lstStyle/>
           <a:p>
-            <a:pPr algn="ctr" indent="0" marL="0">
+            <a:pPr marL="0" indent="0" algn="ctr">
               <a:lnSpc>
                 <a:spcPct val="110000"/>
               </a:lnSpc>
@@ -7443,13 +7501,20 @@
           </a:solidFill>
           <a:ln/>
           <a:effectLst>
-            <a:outerShdw sx="100000" sy="100000" kx="0" ky="0" algn="bl" rotWithShape="0" blurRad="101600" dist="38100" dir="8100000">
+            <a:outerShdw blurRad="101600" dist="38100" dir="8100000" algn="bl" rotWithShape="0">
               <a:srgbClr val="000000">
                 <a:alpha val="12000"/>
               </a:srgbClr>
             </a:outerShdw>
           </a:effectLst>
         </p:spPr>
+        <p:txBody>
+          <a:bodyPr/>
+          <a:lstStyle/>
+          <a:p>
+            <a:endParaRPr lang="fr-FR"/>
+          </a:p>
+        </p:txBody>
       </p:sp>
       <p:sp>
         <p:nvSpPr>
@@ -7472,7 +7537,7 @@
           <a:bodyPr wrap="square" lIns="0" tIns="0" rIns="0" bIns="0" rtlCol="0" anchor="ctr"/>
           <a:lstStyle/>
           <a:p>
-            <a:pPr algn="ctr" indent="0" marL="0">
+            <a:pPr marL="0" indent="0" algn="ctr">
               <a:buNone/>
             </a:pPr>
             <a:r>
@@ -7508,7 +7573,7 @@
           <a:bodyPr wrap="square" lIns="0" tIns="0" rIns="0" bIns="0" rtlCol="0" anchor="ctr"/>
           <a:lstStyle/>
           <a:p>
-            <a:pPr algn="ctr" indent="0" marL="0">
+            <a:pPr marL="0" indent="0" algn="ctr">
               <a:lnSpc>
                 <a:spcPct val="110000"/>
               </a:lnSpc>
@@ -7545,13 +7610,20 @@
           </a:solidFill>
           <a:ln/>
           <a:effectLst>
-            <a:outerShdw sx="100000" sy="100000" kx="0" ky="0" algn="bl" rotWithShape="0" blurRad="101600" dist="38100" dir="8100000">
+            <a:outerShdw blurRad="101600" dist="38100" dir="8100000" algn="bl" rotWithShape="0">
               <a:srgbClr val="000000">
                 <a:alpha val="12000"/>
               </a:srgbClr>
             </a:outerShdw>
           </a:effectLst>
         </p:spPr>
+        <p:txBody>
+          <a:bodyPr/>
+          <a:lstStyle/>
+          <a:p>
+            <a:endParaRPr lang="fr-FR"/>
+          </a:p>
+        </p:txBody>
       </p:sp>
       <p:sp>
         <p:nvSpPr>
@@ -7574,7 +7646,7 @@
           <a:bodyPr wrap="square" lIns="0" tIns="0" rIns="0" bIns="0" rtlCol="0" anchor="ctr"/>
           <a:lstStyle/>
           <a:p>
-            <a:pPr algn="ctr" indent="0" marL="0">
+            <a:pPr marL="0" indent="0" algn="ctr">
               <a:buNone/>
             </a:pPr>
             <a:r>
@@ -7610,7 +7682,7 @@
           <a:bodyPr wrap="square" lIns="0" tIns="0" rIns="0" bIns="0" rtlCol="0" anchor="ctr"/>
           <a:lstStyle/>
           <a:p>
-            <a:pPr algn="ctr" indent="0" marL="0">
+            <a:pPr marL="0" indent="0" algn="ctr">
               <a:lnSpc>
                 <a:spcPct val="110000"/>
               </a:lnSpc>
@@ -7649,7 +7721,7 @@
           <a:bodyPr wrap="square" lIns="0" tIns="0" rIns="0" bIns="0" rtlCol="0" anchor="ctr"/>
           <a:lstStyle/>
           <a:p>
-            <a:pPr algn="ctr" indent="0" marL="0">
+            <a:pPr marL="0" indent="0" algn="ctr">
               <a:buNone/>
             </a:pPr>
             <a:r>
@@ -7683,13 +7755,20 @@
           </a:solidFill>
           <a:ln/>
           <a:effectLst>
-            <a:outerShdw sx="100000" sy="100000" kx="0" ky="0" algn="bl" rotWithShape="0" blurRad="101600" dist="38100" dir="8100000">
+            <a:outerShdw blurRad="101600" dist="38100" dir="8100000" algn="bl" rotWithShape="0">
               <a:srgbClr val="000000">
                 <a:alpha val="12000"/>
               </a:srgbClr>
             </a:outerShdw>
           </a:effectLst>
         </p:spPr>
+        <p:txBody>
+          <a:bodyPr/>
+          <a:lstStyle/>
+          <a:p>
+            <a:endParaRPr lang="fr-FR"/>
+          </a:p>
+        </p:txBody>
       </p:sp>
       <p:sp>
         <p:nvSpPr>
@@ -7712,7 +7791,7 @@
           <a:bodyPr wrap="square" lIns="0" tIns="0" rIns="0" bIns="0" rtlCol="0" anchor="ctr"/>
           <a:lstStyle/>
           <a:p>
-            <a:pPr algn="ctr" indent="0" marL="0">
+            <a:pPr marL="0" indent="0" algn="ctr">
               <a:lnSpc>
                 <a:spcPct val="130000"/>
               </a:lnSpc>
@@ -7729,7 +7808,7 @@
             <a:endParaRPr lang="en-US" sz="1600" dirty="0"/>
           </a:p>
           <a:p>
-            <a:pPr algn="ctr" indent="0" marL="0">
+            <a:pPr marL="0" indent="0" algn="ctr">
               <a:lnSpc>
                 <a:spcPct val="130000"/>
               </a:lnSpc>
@@ -7771,13 +7850,20 @@
             <a:prstDash val="solid"/>
           </a:ln>
           <a:effectLst>
-            <a:outerShdw sx="100000" sy="100000" kx="0" ky="0" algn="bl" rotWithShape="0" blurRad="101600" dist="38100" dir="8100000">
+            <a:outerShdw blurRad="101600" dist="38100" dir="8100000" algn="bl" rotWithShape="0">
               <a:srgbClr val="000000">
                 <a:alpha val="12000"/>
               </a:srgbClr>
             </a:outerShdw>
           </a:effectLst>
         </p:spPr>
+        <p:txBody>
+          <a:bodyPr/>
+          <a:lstStyle/>
+          <a:p>
+            <a:endParaRPr lang="fr-FR"/>
+          </a:p>
+        </p:txBody>
       </p:sp>
       <p:sp>
         <p:nvSpPr>
@@ -7800,7 +7886,7 @@
           <a:bodyPr wrap="square" lIns="0" tIns="0" rIns="0" bIns="0" rtlCol="0" anchor="ctr"/>
           <a:lstStyle/>
           <a:p>
-            <a:pPr indent="0" marL="0">
+            <a:pPr marL="0" indent="0">
               <a:buNone/>
             </a:pPr>
             <a:r>
@@ -7836,7 +7922,7 @@
           <a:bodyPr wrap="square" lIns="0" tIns="0" rIns="0" bIns="0" rtlCol="0" anchor="ctr"/>
           <a:lstStyle/>
           <a:p>
-            <a:pPr indent="0" marL="0">
+            <a:pPr marL="0" indent="0">
               <a:buNone/>
             </a:pPr>
             <a:r>
@@ -7847,9 +7933,6 @@
               </a:rPr>
               <a:t>✓  </a:t>
             </a:r>
-            <a:pPr indent="0" marL="0">
-              <a:buNone/>
-            </a:pPr>
             <a:r>
               <a:rPr lang="en-US" sz="1200" dirty="0">
                 <a:solidFill>
@@ -7883,7 +7966,7 @@
           <a:bodyPr wrap="square" lIns="0" tIns="0" rIns="0" bIns="0" rtlCol="0" anchor="ctr"/>
           <a:lstStyle/>
           <a:p>
-            <a:pPr indent="0" marL="0">
+            <a:pPr marL="0" indent="0">
               <a:buNone/>
             </a:pPr>
             <a:r>
@@ -7894,9 +7977,6 @@
               </a:rPr>
               <a:t>✓  </a:t>
             </a:r>
-            <a:pPr indent="0" marL="0">
-              <a:buNone/>
-            </a:pPr>
             <a:r>
               <a:rPr lang="en-US" sz="1200" dirty="0">
                 <a:solidFill>
@@ -7930,7 +8010,7 @@
           <a:bodyPr wrap="square" lIns="0" tIns="0" rIns="0" bIns="0" rtlCol="0" anchor="ctr"/>
           <a:lstStyle/>
           <a:p>
-            <a:pPr indent="0" marL="0">
+            <a:pPr marL="0" indent="0">
               <a:buNone/>
             </a:pPr>
             <a:r>
@@ -7941,9 +8021,6 @@
               </a:rPr>
               <a:t>✓  </a:t>
             </a:r>
-            <a:pPr indent="0" marL="0">
-              <a:buNone/>
-            </a:pPr>
             <a:r>
               <a:rPr lang="en-US" sz="1200" dirty="0">
                 <a:solidFill>
@@ -7977,7 +8054,7 @@
           <a:bodyPr wrap="square" lIns="0" tIns="0" rIns="0" bIns="0" rtlCol="0" anchor="ctr"/>
           <a:lstStyle/>
           <a:p>
-            <a:pPr indent="0" marL="0">
+            <a:pPr marL="0" indent="0">
               <a:buNone/>
             </a:pPr>
             <a:r>
@@ -7988,9 +8065,6 @@
               </a:rPr>
               <a:t>✓  </a:t>
             </a:r>
-            <a:pPr indent="0" marL="0">
-              <a:buNone/>
-            </a:pPr>
             <a:r>
               <a:rPr lang="en-US" sz="1200" dirty="0">
                 <a:solidFill>
@@ -8024,7 +8098,7 @@
           <a:bodyPr wrap="square" lIns="0" tIns="0" rIns="0" bIns="0" rtlCol="0" anchor="ctr"/>
           <a:lstStyle/>
           <a:p>
-            <a:pPr indent="0" marL="0">
+            <a:pPr marL="0" indent="0">
               <a:buNone/>
             </a:pPr>
             <a:r>
@@ -8035,9 +8109,6 @@
               </a:rPr>
               <a:t>✓  </a:t>
             </a:r>
-            <a:pPr indent="0" marL="0">
-              <a:buNone/>
-            </a:pPr>
             <a:r>
               <a:rPr lang="en-US" sz="1200" dirty="0">
                 <a:solidFill>
@@ -8074,13 +8145,20 @@
             <a:prstDash val="solid"/>
           </a:ln>
           <a:effectLst>
-            <a:outerShdw sx="100000" sy="100000" kx="0" ky="0" algn="bl" rotWithShape="0" blurRad="101600" dist="38100" dir="8100000">
+            <a:outerShdw blurRad="101600" dist="38100" dir="8100000" algn="bl" rotWithShape="0">
               <a:srgbClr val="000000">
                 <a:alpha val="12000"/>
               </a:srgbClr>
             </a:outerShdw>
           </a:effectLst>
         </p:spPr>
+        <p:txBody>
+          <a:bodyPr/>
+          <a:lstStyle/>
+          <a:p>
+            <a:endParaRPr lang="fr-FR"/>
+          </a:p>
+        </p:txBody>
       </p:sp>
       <p:sp>
         <p:nvSpPr>
@@ -8103,7 +8181,7 @@
           <a:bodyPr wrap="square" lIns="0" tIns="0" rIns="0" bIns="0" rtlCol="0" anchor="ctr"/>
           <a:lstStyle/>
           <a:p>
-            <a:pPr indent="0" marL="0">
+            <a:pPr marL="0" indent="0">
               <a:buNone/>
             </a:pPr>
             <a:r>
@@ -8139,7 +8217,7 @@
           <a:bodyPr wrap="square" lIns="0" tIns="0" rIns="0" bIns="0" rtlCol="0" anchor="ctr"/>
           <a:lstStyle/>
           <a:p>
-            <a:pPr indent="0" marL="0">
+            <a:pPr marL="0" indent="0">
               <a:lnSpc>
                 <a:spcPct val="130000"/>
               </a:lnSpc>
@@ -8153,19 +8231,60 @@
               </a:rPr>
               <a:t>✗  </a:t>
             </a:r>
-            <a:pPr indent="0" marL="0">
+            <a:r>
+              <a:rPr lang="en-US" sz="1200" dirty="0">
+                <a:solidFill>
+                  <a:srgbClr val="1E293B"/>
+                </a:solidFill>
+              </a:rPr>
+              <a:t>10 epochs insuffisantes (courbes non convergées)</a:t>
+            </a:r>
+            <a:endParaRPr lang="en-US" sz="1200" dirty="0"/>
+          </a:p>
+        </p:txBody>
+      </p:sp>
+      <p:sp>
+        <p:nvSpPr>
+          <p:cNvPr id="31" name="Text 29"/>
+          <p:cNvSpPr/>
+          <p:nvPr/>
+        </p:nvSpPr>
+        <p:spPr>
+          <a:xfrm>
+            <a:off x="4892040" y="3547872"/>
+            <a:ext cx="3749040" cy="475488"/>
+          </a:xfrm>
+          <a:prstGeom prst="rect">
+            <a:avLst/>
+          </a:prstGeom>
+          <a:noFill/>
+          <a:ln/>
+        </p:spPr>
+        <p:txBody>
+          <a:bodyPr wrap="square" lIns="0" tIns="0" rIns="0" bIns="0" rtlCol="0" anchor="ctr"/>
+          <a:lstStyle/>
+          <a:p>
+            <a:pPr marL="0" indent="0">
               <a:lnSpc>
                 <a:spcPct val="130000"/>
               </a:lnSpc>
               <a:buNone/>
             </a:pPr>
             <a:r>
+              <a:rPr lang="en-US" sz="1200" b="1" dirty="0">
+                <a:solidFill>
+                  <a:srgbClr val="EF476F"/>
+                </a:solidFill>
+              </a:rPr>
+              <a:t>✗  </a:t>
+            </a:r>
+            <a:r>
               <a:rPr lang="en-US" sz="1200" dirty="0">
                 <a:solidFill>
                   <a:srgbClr val="1E293B"/>
                 </a:solidFill>
               </a:rPr>
-              <a:t>10 epochs insuffisantes (courbes non convergées)</a:t>
+              <a:t>Double-correction déséquilibre → instabilité</a:t>
             </a:r>
             <a:endParaRPr lang="en-US" sz="1200" dirty="0"/>
           </a:p>
@@ -8173,13 +8292,13 @@
       </p:sp>
       <p:sp>
         <p:nvSpPr>
-          <p:cNvPr id="31" name="Text 29"/>
-          <p:cNvSpPr/>
-          <p:nvPr/>
-        </p:nvSpPr>
-        <p:spPr>
-          <a:xfrm>
-            <a:off x="4892040" y="3547872"/>
+          <p:cNvPr id="32" name="Text 30"/>
+          <p:cNvSpPr/>
+          <p:nvPr/>
+        </p:nvSpPr>
+        <p:spPr>
+          <a:xfrm>
+            <a:off x="4892040" y="4059936"/>
             <a:ext cx="3749040" cy="475488"/>
           </a:xfrm>
           <a:prstGeom prst="rect">
@@ -8192,7 +8311,7 @@
           <a:bodyPr wrap="square" lIns="0" tIns="0" rIns="0" bIns="0" rtlCol="0" anchor="ctr"/>
           <a:lstStyle/>
           <a:p>
-            <a:pPr indent="0" marL="0">
+            <a:pPr marL="0" indent="0">
               <a:lnSpc>
                 <a:spcPct val="130000"/>
               </a:lnSpc>
@@ -8206,65 +8325,6 @@
               </a:rPr>
               <a:t>✗  </a:t>
             </a:r>
-            <a:pPr indent="0" marL="0">
-              <a:lnSpc>
-                <a:spcPct val="130000"/>
-              </a:lnSpc>
-              <a:buNone/>
-            </a:pPr>
-            <a:r>
-              <a:rPr lang="en-US" sz="1200" dirty="0">
-                <a:solidFill>
-                  <a:srgbClr val="1E293B"/>
-                </a:solidFill>
-              </a:rPr>
-              <a:t>Double-correction déséquilibre → instabilité</a:t>
-            </a:r>
-            <a:endParaRPr lang="en-US" sz="1200" dirty="0"/>
-          </a:p>
-        </p:txBody>
-      </p:sp>
-      <p:sp>
-        <p:nvSpPr>
-          <p:cNvPr id="32" name="Text 30"/>
-          <p:cNvSpPr/>
-          <p:nvPr/>
-        </p:nvSpPr>
-        <p:spPr>
-          <a:xfrm>
-            <a:off x="4892040" y="4059936"/>
-            <a:ext cx="3749040" cy="475488"/>
-          </a:xfrm>
-          <a:prstGeom prst="rect">
-            <a:avLst/>
-          </a:prstGeom>
-          <a:noFill/>
-          <a:ln/>
-        </p:spPr>
-        <p:txBody>
-          <a:bodyPr wrap="square" lIns="0" tIns="0" rIns="0" bIns="0" rtlCol="0" anchor="ctr"/>
-          <a:lstStyle/>
-          <a:p>
-            <a:pPr indent="0" marL="0">
-              <a:lnSpc>
-                <a:spcPct val="130000"/>
-              </a:lnSpc>
-              <a:buNone/>
-            </a:pPr>
-            <a:r>
-              <a:rPr lang="en-US" sz="1200" b="1" dirty="0">
-                <a:solidFill>
-                  <a:srgbClr val="EF476F"/>
-                </a:solidFill>
-              </a:rPr>
-              <a:t>✗  </a:t>
-            </a:r>
-            <a:pPr indent="0" marL="0">
-              <a:lnSpc>
-                <a:spcPct val="130000"/>
-              </a:lnSpc>
-              <a:buNone/>
-            </a:pPr>
             <a:r>
               <a:rPr lang="en-US" sz="1200" dirty="0">
                 <a:solidFill>
@@ -8293,6 +8353,7 @@
         <a:solidFill>
           <a:srgbClr val="F0F6FF"/>
         </a:solidFill>
+        <a:effectLst/>
       </p:bgPr>
     </p:bg>
     <p:spTree>
@@ -8328,6 +8389,13 @@
           </a:solidFill>
           <a:ln/>
         </p:spPr>
+        <p:txBody>
+          <a:bodyPr/>
+          <a:lstStyle/>
+          <a:p>
+            <a:endParaRPr lang="fr-FR"/>
+          </a:p>
+        </p:txBody>
       </p:sp>
       <p:sp>
         <p:nvSpPr>
@@ -8350,11 +8418,11 @@
           <a:bodyPr wrap="square" lIns="0" tIns="0" rIns="0" bIns="0" rtlCol="0" anchor="ctr"/>
           <a:lstStyle/>
           <a:p>
-            <a:pPr indent="0" marL="0">
-              <a:buNone/>
-            </a:pPr>
-            <a:r>
-              <a:rPr lang="en-US" sz="1100" b="1" spc="300" kern="0" dirty="0">
+            <a:pPr marL="0" indent="0">
+              <a:buNone/>
+            </a:pPr>
+            <a:r>
+              <a:rPr lang="en-US" sz="1100" b="1" kern="0" spc="300" dirty="0">
                 <a:solidFill>
                   <a:srgbClr val="00B4D8"/>
                 </a:solidFill>
@@ -8386,7 +8454,7 @@
           <a:bodyPr wrap="square" lIns="0" tIns="0" rIns="0" bIns="0" rtlCol="0" anchor="ctr"/>
           <a:lstStyle/>
           <a:p>
-            <a:pPr indent="0" marL="0">
+            <a:pPr marL="0" indent="0">
               <a:buNone/>
             </a:pPr>
             <a:r>
@@ -8420,13 +8488,20 @@
           </a:solidFill>
           <a:ln/>
           <a:effectLst>
-            <a:outerShdw sx="100000" sy="100000" kx="0" ky="0" algn="bl" rotWithShape="0" blurRad="101600" dist="38100" dir="8100000">
+            <a:outerShdw blurRad="101600" dist="38100" dir="8100000" algn="bl" rotWithShape="0">
               <a:srgbClr val="000000">
                 <a:alpha val="12000"/>
               </a:srgbClr>
             </a:outerShdw>
           </a:effectLst>
         </p:spPr>
+        <p:txBody>
+          <a:bodyPr/>
+          <a:lstStyle/>
+          <a:p>
+            <a:endParaRPr lang="fr-FR"/>
+          </a:p>
+        </p:txBody>
       </p:sp>
       <p:sp>
         <p:nvSpPr>
@@ -8447,6 +8522,13 @@
           </a:solidFill>
           <a:ln/>
         </p:spPr>
+        <p:txBody>
+          <a:bodyPr/>
+          <a:lstStyle/>
+          <a:p>
+            <a:endParaRPr lang="fr-FR"/>
+          </a:p>
+        </p:txBody>
       </p:sp>
       <p:sp>
         <p:nvSpPr>
@@ -8469,7 +8551,7 @@
           <a:bodyPr wrap="square" lIns="0" tIns="0" rIns="0" bIns="0" rtlCol="0" anchor="ctr"/>
           <a:lstStyle/>
           <a:p>
-            <a:pPr indent="0" marL="0">
+            <a:pPr marL="0" indent="0">
               <a:buNone/>
             </a:pPr>
             <a:r>
@@ -8505,7 +8587,7 @@
           <a:bodyPr wrap="square" lIns="0" tIns="0" rIns="0" bIns="0" rtlCol="0" anchor="ctr"/>
           <a:lstStyle/>
           <a:p>
-            <a:pPr indent="0" marL="0">
+            <a:pPr marL="0" indent="0">
               <a:lnSpc>
                 <a:spcPct val="140000"/>
               </a:lnSpc>
@@ -8518,9 +8600,20 @@
                 </a:solidFill>
               </a:rPr>
               <a:t>patience = 8  ·  max 50 epochs
-</a:t>
-            </a:r>
-            <a:pPr indent="0" marL="0">
+Poids de loss adoucis </a:t>
+            </a:r>
+            <a:r>
+              <a:rPr lang="en-US" sz="1200" i="1" dirty="0">
+                <a:solidFill>
+                  <a:srgbClr val="1E293B"/>
+                </a:solidFill>
+              </a:rPr>
+              <a:t>(√ poids inverses)</a:t>
+            </a:r>
+            <a:endParaRPr lang="en-US" sz="1200" dirty="0"/>
+          </a:p>
+          <a:p>
+            <a:pPr marL="0" indent="0">
               <a:lnSpc>
                 <a:spcPct val="140000"/>
               </a:lnSpc>
@@ -8532,43 +8625,6 @@
                   <a:srgbClr val="1E293B"/>
                 </a:solidFill>
               </a:rPr>
-              <a:t>Poids de loss adoucis </a:t>
-            </a:r>
-            <a:pPr indent="0" marL="0">
-              <a:lnSpc>
-                <a:spcPct val="140000"/>
-              </a:lnSpc>
-              <a:buNone/>
-            </a:pPr>
-            <a:r>
-              <a:rPr lang="en-US" sz="1200" i="1" dirty="0">
-                <a:solidFill>
-                  <a:srgbClr val="1E293B"/>
-                </a:solidFill>
-              </a:rPr>
-              <a:t>(√ poids inverses)</a:t>
-            </a:r>
-            <a:pPr indent="0" marL="0">
-              <a:lnSpc>
-                <a:spcPct val="140000"/>
-              </a:lnSpc>
-              <a:buNone/>
-            </a:pPr>
-            <a:endParaRPr lang="en-US" sz="1200" dirty="0"/>
-          </a:p>
-          <a:p>
-            <a:pPr indent="0" marL="0">
-              <a:lnSpc>
-                <a:spcPct val="140000"/>
-              </a:lnSpc>
-              <a:buNone/>
-            </a:pPr>
-            <a:r>
-              <a:rPr lang="en-US" sz="1200" dirty="0">
-                <a:solidFill>
-                  <a:srgbClr val="1E293B"/>
-                </a:solidFill>
-              </a:rPr>
               <a:t>Métrique ajoutée : balanced_accuracy_score</a:t>
             </a:r>
             <a:endParaRPr lang="en-US" sz="1200" dirty="0"/>
@@ -8594,13 +8650,20 @@
           </a:solidFill>
           <a:ln/>
           <a:effectLst>
-            <a:outerShdw sx="100000" sy="100000" kx="0" ky="0" algn="bl" rotWithShape="0" blurRad="101600" dist="38100" dir="8100000">
+            <a:outerShdw blurRad="101600" dist="38100" dir="8100000" algn="bl" rotWithShape="0">
               <a:srgbClr val="000000">
                 <a:alpha val="12000"/>
               </a:srgbClr>
             </a:outerShdw>
           </a:effectLst>
         </p:spPr>
+        <p:txBody>
+          <a:bodyPr/>
+          <a:lstStyle/>
+          <a:p>
+            <a:endParaRPr lang="fr-FR"/>
+          </a:p>
+        </p:txBody>
       </p:sp>
       <p:sp>
         <p:nvSpPr>
@@ -8621,6 +8684,13 @@
           </a:solidFill>
           <a:ln/>
         </p:spPr>
+        <p:txBody>
+          <a:bodyPr/>
+          <a:lstStyle/>
+          <a:p>
+            <a:endParaRPr lang="fr-FR"/>
+          </a:p>
+        </p:txBody>
       </p:sp>
       <p:sp>
         <p:nvSpPr>
@@ -8643,7 +8713,7 @@
           <a:bodyPr wrap="square" lIns="0" tIns="0" rIns="0" bIns="0" rtlCol="0" anchor="ctr"/>
           <a:lstStyle/>
           <a:p>
-            <a:pPr indent="0" marL="0">
+            <a:pPr marL="0" indent="0">
               <a:buNone/>
             </a:pPr>
             <a:r>
@@ -8677,6 +8747,13 @@
           </a:solidFill>
           <a:ln/>
         </p:spPr>
+        <p:txBody>
+          <a:bodyPr/>
+          <a:lstStyle/>
+          <a:p>
+            <a:endParaRPr lang="fr-FR"/>
+          </a:p>
+        </p:txBody>
       </p:sp>
       <p:sp>
         <p:nvSpPr>
@@ -8699,7 +8776,7 @@
           <a:bodyPr wrap="square" lIns="0" tIns="0" rIns="0" bIns="0" rtlCol="0" anchor="ctr"/>
           <a:lstStyle/>
           <a:p>
-            <a:pPr algn="ctr" indent="0" marL="0">
+            <a:pPr marL="0" indent="0" algn="ctr">
               <a:buNone/>
             </a:pPr>
             <a:r>
@@ -8735,7 +8812,7 @@
           <a:bodyPr wrap="square" lIns="0" tIns="0" rIns="0" bIns="0" rtlCol="0" anchor="ctr"/>
           <a:lstStyle/>
           <a:p>
-            <a:pPr indent="0" marL="0">
+            <a:pPr marL="0" indent="0">
               <a:buNone/>
             </a:pPr>
             <a:r>
@@ -8771,7 +8848,7 @@
           <a:bodyPr wrap="square" lIns="0" tIns="0" rIns="0" bIns="0" rtlCol="0" anchor="ctr"/>
           <a:lstStyle/>
           <a:p>
-            <a:pPr indent="0" marL="0">
+            <a:pPr marL="0" indent="0">
               <a:lnSpc>
                 <a:spcPct val="120000"/>
               </a:lnSpc>
@@ -8808,6 +8885,13 @@
           </a:solidFill>
           <a:ln/>
         </p:spPr>
+        <p:txBody>
+          <a:bodyPr/>
+          <a:lstStyle/>
+          <a:p>
+            <a:endParaRPr lang="fr-FR"/>
+          </a:p>
+        </p:txBody>
       </p:sp>
       <p:sp>
         <p:nvSpPr>
@@ -8830,7 +8914,7 @@
           <a:bodyPr wrap="square" lIns="0" tIns="0" rIns="0" bIns="0" rtlCol="0" anchor="ctr"/>
           <a:lstStyle/>
           <a:p>
-            <a:pPr algn="ctr" indent="0" marL="0">
+            <a:pPr marL="0" indent="0" algn="ctr">
               <a:buNone/>
             </a:pPr>
             <a:r>
@@ -8866,7 +8950,7 @@
           <a:bodyPr wrap="square" lIns="0" tIns="0" rIns="0" bIns="0" rtlCol="0" anchor="ctr"/>
           <a:lstStyle/>
           <a:p>
-            <a:pPr indent="0" marL="0">
+            <a:pPr marL="0" indent="0">
               <a:buNone/>
             </a:pPr>
             <a:r>
@@ -8902,7 +8986,7 @@
           <a:bodyPr wrap="square" lIns="0" tIns="0" rIns="0" bIns="0" rtlCol="0" anchor="ctr"/>
           <a:lstStyle/>
           <a:p>
-            <a:pPr indent="0" marL="0">
+            <a:pPr marL="0" indent="0">
               <a:lnSpc>
                 <a:spcPct val="120000"/>
               </a:lnSpc>
@@ -8939,6 +9023,13 @@
           </a:solidFill>
           <a:ln/>
         </p:spPr>
+        <p:txBody>
+          <a:bodyPr/>
+          <a:lstStyle/>
+          <a:p>
+            <a:endParaRPr lang="fr-FR"/>
+          </a:p>
+        </p:txBody>
       </p:sp>
       <p:sp>
         <p:nvSpPr>
@@ -8961,7 +9052,7 @@
           <a:bodyPr wrap="square" lIns="0" tIns="0" rIns="0" bIns="0" rtlCol="0" anchor="ctr"/>
           <a:lstStyle/>
           <a:p>
-            <a:pPr algn="ctr" indent="0" marL="0">
+            <a:pPr marL="0" indent="0" algn="ctr">
               <a:buNone/>
             </a:pPr>
             <a:r>
@@ -8997,7 +9088,7 @@
           <a:bodyPr wrap="square" lIns="0" tIns="0" rIns="0" bIns="0" rtlCol="0" anchor="ctr"/>
           <a:lstStyle/>
           <a:p>
-            <a:pPr indent="0" marL="0">
+            <a:pPr marL="0" indent="0">
               <a:buNone/>
             </a:pPr>
             <a:r>
@@ -9033,7 +9124,7 @@
           <a:bodyPr wrap="square" lIns="0" tIns="0" rIns="0" bIns="0" rtlCol="0" anchor="ctr"/>
           <a:lstStyle/>
           <a:p>
-            <a:pPr indent="0" marL="0">
+            <a:pPr marL="0" indent="0">
               <a:lnSpc>
                 <a:spcPct val="120000"/>
               </a:lnSpc>
@@ -9070,6 +9161,13 @@
           </a:solidFill>
           <a:ln/>
         </p:spPr>
+        <p:txBody>
+          <a:bodyPr/>
+          <a:lstStyle/>
+          <a:p>
+            <a:endParaRPr lang="fr-FR"/>
+          </a:p>
+        </p:txBody>
       </p:sp>
       <p:sp>
         <p:nvSpPr>
@@ -9092,7 +9190,7 @@
           <a:bodyPr wrap="square" lIns="0" tIns="0" rIns="0" bIns="0" rtlCol="0" anchor="ctr"/>
           <a:lstStyle/>
           <a:p>
-            <a:pPr algn="ctr" indent="0" marL="0">
+            <a:pPr marL="0" indent="0" algn="ctr">
               <a:buNone/>
             </a:pPr>
             <a:r>
@@ -9128,7 +9226,7 @@
           <a:bodyPr wrap="square" lIns="0" tIns="0" rIns="0" bIns="0" rtlCol="0" anchor="ctr"/>
           <a:lstStyle/>
           <a:p>
-            <a:pPr indent="0" marL="0">
+            <a:pPr marL="0" indent="0">
               <a:buNone/>
             </a:pPr>
             <a:r>
@@ -9164,7 +9262,7 @@
           <a:bodyPr wrap="square" lIns="0" tIns="0" rIns="0" bIns="0" rtlCol="0" anchor="ctr"/>
           <a:lstStyle/>
           <a:p>
-            <a:pPr indent="0" marL="0">
+            <a:pPr marL="0" indent="0">
               <a:lnSpc>
                 <a:spcPct val="120000"/>
               </a:lnSpc>
@@ -9201,6 +9299,13 @@
           </a:solidFill>
           <a:ln/>
         </p:spPr>
+        <p:txBody>
+          <a:bodyPr/>
+          <a:lstStyle/>
+          <a:p>
+            <a:endParaRPr lang="fr-FR"/>
+          </a:p>
+        </p:txBody>
       </p:sp>
       <p:sp>
         <p:nvSpPr>
@@ -9223,7 +9328,7 @@
           <a:bodyPr wrap="square" lIns="0" tIns="0" rIns="0" bIns="0" rtlCol="0" anchor="ctr"/>
           <a:lstStyle/>
           <a:p>
-            <a:pPr algn="ctr" indent="0" marL="0">
+            <a:pPr marL="0" indent="0" algn="ctr">
               <a:buNone/>
             </a:pPr>
             <a:r>
@@ -9259,7 +9364,7 @@
           <a:bodyPr wrap="square" lIns="0" tIns="0" rIns="0" bIns="0" rtlCol="0" anchor="ctr"/>
           <a:lstStyle/>
           <a:p>
-            <a:pPr indent="0" marL="0">
+            <a:pPr marL="0" indent="0">
               <a:buNone/>
             </a:pPr>
             <a:r>
@@ -9295,7 +9400,7 @@
           <a:bodyPr wrap="square" lIns="0" tIns="0" rIns="0" bIns="0" rtlCol="0" anchor="ctr"/>
           <a:lstStyle/>
           <a:p>
-            <a:pPr indent="0" marL="0">
+            <a:pPr marL="0" indent="0">
               <a:lnSpc>
                 <a:spcPct val="120000"/>
               </a:lnSpc>
@@ -9337,13 +9442,20 @@
             <a:prstDash val="solid"/>
           </a:ln>
           <a:effectLst>
-            <a:outerShdw sx="100000" sy="100000" kx="0" ky="0" algn="bl" rotWithShape="0" blurRad="101600" dist="38100" dir="8100000">
+            <a:outerShdw blurRad="101600" dist="38100" dir="8100000" algn="bl" rotWithShape="0">
               <a:srgbClr val="000000">
                 <a:alpha val="12000"/>
               </a:srgbClr>
             </a:outerShdw>
           </a:effectLst>
         </p:spPr>
+        <p:txBody>
+          <a:bodyPr/>
+          <a:lstStyle/>
+          <a:p>
+            <a:endParaRPr lang="fr-FR"/>
+          </a:p>
+        </p:txBody>
       </p:sp>
       <p:sp>
         <p:nvSpPr>
@@ -9366,7 +9478,7 @@
           <a:bodyPr wrap="square" lIns="0" tIns="0" rIns="0" bIns="0" rtlCol="0" anchor="ctr"/>
           <a:lstStyle/>
           <a:p>
-            <a:pPr indent="0" marL="0">
+            <a:pPr marL="0" indent="0">
               <a:buNone/>
             </a:pPr>
             <a:r>
@@ -9402,7 +9514,7 @@
           <a:bodyPr wrap="square" lIns="0" tIns="0" rIns="0" bIns="0" rtlCol="0" anchor="ctr"/>
           <a:lstStyle/>
           <a:p>
-            <a:pPr algn="ctr" indent="0" marL="0">
+            <a:pPr marL="0" indent="0" algn="ctr">
               <a:buNone/>
             </a:pPr>
             <a:r>
@@ -9438,7 +9550,7 @@
           <a:bodyPr wrap="square" lIns="0" tIns="0" rIns="0" bIns="0" rtlCol="0" anchor="ctr"/>
           <a:lstStyle/>
           <a:p>
-            <a:pPr algn="ctr" indent="0" marL="0">
+            <a:pPr marL="0" indent="0" algn="ctr">
               <a:buNone/>
             </a:pPr>
             <a:r>
@@ -9474,7 +9586,7 @@
           <a:bodyPr wrap="square" lIns="0" tIns="0" rIns="0" bIns="0" rtlCol="0" anchor="ctr"/>
           <a:lstStyle/>
           <a:p>
-            <a:pPr algn="ctr" indent="0" marL="0">
+            <a:pPr marL="0" indent="0" algn="ctr">
               <a:lnSpc>
                 <a:spcPct val="130000"/>
               </a:lnSpc>
@@ -9491,7 +9603,7 @@
             <a:endParaRPr lang="en-US" sz="1100" dirty="0"/>
           </a:p>
           <a:p>
-            <a:pPr algn="ctr" indent="0" marL="0">
+            <a:pPr marL="0" indent="0" algn="ctr">
               <a:lnSpc>
                 <a:spcPct val="130000"/>
               </a:lnSpc>
@@ -9525,6 +9637,7 @@
         <a:solidFill>
           <a:srgbClr val="0F172A"/>
         </a:solidFill>
+        <a:effectLst/>
       </p:bgPr>
     </p:bg>
     <p:spTree>
@@ -9560,6 +9673,13 @@
           </a:solidFill>
           <a:ln/>
         </p:spPr>
+        <p:txBody>
+          <a:bodyPr/>
+          <a:lstStyle/>
+          <a:p>
+            <a:endParaRPr lang="fr-FR"/>
+          </a:p>
+        </p:txBody>
       </p:sp>
       <p:sp>
         <p:nvSpPr>
@@ -9582,11 +9702,11 @@
           <a:bodyPr wrap="square" lIns="0" tIns="0" rIns="0" bIns="0" rtlCol="0" anchor="ctr"/>
           <a:lstStyle/>
           <a:p>
-            <a:pPr indent="0" marL="0">
-              <a:buNone/>
-            </a:pPr>
-            <a:r>
-              <a:rPr lang="en-US" sz="1100" b="1" spc="300" kern="0" dirty="0">
+            <a:pPr marL="0" indent="0">
+              <a:buNone/>
+            </a:pPr>
+            <a:r>
+              <a:rPr lang="en-US" sz="1100" b="1" kern="0" spc="300" dirty="0">
                 <a:solidFill>
                   <a:srgbClr val="00B4D8"/>
                 </a:solidFill>
@@ -9618,7 +9738,7 @@
           <a:bodyPr wrap="square" lIns="0" tIns="0" rIns="0" bIns="0" rtlCol="0" anchor="ctr"/>
           <a:lstStyle/>
           <a:p>
-            <a:pPr indent="0" marL="0">
+            <a:pPr marL="0" indent="0">
               <a:buNone/>
             </a:pPr>
             <a:r>
@@ -9654,7 +9774,7 @@
           <a:bodyPr wrap="square" lIns="0" tIns="0" rIns="0" bIns="0" rtlCol="0" anchor="ctr"/>
           <a:lstStyle/>
           <a:p>
-            <a:pPr algn="ctr" indent="0" marL="0">
+            <a:pPr marL="0" indent="0" algn="ctr">
               <a:buNone/>
             </a:pPr>
             <a:r>
@@ -9690,7 +9810,7 @@
           <a:bodyPr wrap="square" lIns="0" tIns="0" rIns="0" bIns="0" rtlCol="0" anchor="ctr"/>
           <a:lstStyle/>
           <a:p>
-            <a:pPr algn="ctr" indent="0" marL="0">
+            <a:pPr marL="0" indent="0" algn="ctr">
               <a:lnSpc>
                 <a:spcPct val="140000"/>
               </a:lnSpc>
@@ -9707,7 +9827,7 @@
             <a:endParaRPr lang="en-US" sz="1400" dirty="0"/>
           </a:p>
           <a:p>
-            <a:pPr algn="ctr" indent="0" marL="0">
+            <a:pPr marL="0" indent="0" algn="ctr">
               <a:lnSpc>
                 <a:spcPct val="140000"/>
               </a:lnSpc>
@@ -9746,7 +9866,7 @@
           <a:bodyPr wrap="square" lIns="0" tIns="0" rIns="0" bIns="0" rtlCol="0" anchor="ctr"/>
           <a:lstStyle/>
           <a:p>
-            <a:pPr algn="ctr" indent="0" marL="0">
+            <a:pPr marL="0" indent="0" algn="ctr">
               <a:buNone/>
             </a:pPr>
             <a:r>
@@ -9782,7 +9902,7 @@
           <a:bodyPr wrap="square" lIns="0" tIns="0" rIns="0" bIns="0" rtlCol="0" anchor="ctr"/>
           <a:lstStyle/>
           <a:p>
-            <a:pPr algn="ctr" indent="0" marL="0">
+            <a:pPr marL="0" indent="0" algn="ctr">
               <a:lnSpc>
                 <a:spcPct val="140000"/>
               </a:lnSpc>
@@ -9799,7 +9919,7 @@
             <a:endParaRPr lang="en-US" sz="1200" dirty="0"/>
           </a:p>
           <a:p>
-            <a:pPr algn="ctr" indent="0" marL="0">
+            <a:pPr marL="0" indent="0" algn="ctr">
               <a:lnSpc>
                 <a:spcPct val="140000"/>
               </a:lnSpc>
@@ -9838,7 +9958,7 @@
           <a:bodyPr wrap="square" lIns="0" tIns="0" rIns="0" bIns="0" rtlCol="0" anchor="ctr"/>
           <a:lstStyle/>
           <a:p>
-            <a:pPr indent="0" marL="0">
+            <a:pPr marL="0" indent="0">
               <a:buNone/>
             </a:pPr>
             <a:r>
@@ -9872,6 +9992,13 @@
           </a:solidFill>
           <a:ln/>
         </p:spPr>
+        <p:txBody>
+          <a:bodyPr/>
+          <a:lstStyle/>
+          <a:p>
+            <a:endParaRPr lang="fr-FR"/>
+          </a:p>
+        </p:txBody>
       </p:sp>
       <p:sp>
         <p:nvSpPr>
@@ -9894,7 +10021,7 @@
           <a:bodyPr wrap="square" lIns="0" tIns="0" rIns="0" bIns="0" rtlCol="0" anchor="ctr"/>
           <a:lstStyle/>
           <a:p>
-            <a:pPr indent="0" marL="0">
+            <a:pPr marL="0" indent="0">
               <a:buNone/>
             </a:pPr>
             <a:r>
@@ -9928,6 +10055,13 @@
           </a:solidFill>
           <a:ln/>
         </p:spPr>
+        <p:txBody>
+          <a:bodyPr/>
+          <a:lstStyle/>
+          <a:p>
+            <a:endParaRPr lang="fr-FR"/>
+          </a:p>
+        </p:txBody>
       </p:sp>
       <p:sp>
         <p:nvSpPr>
@@ -9950,7 +10084,7 @@
           <a:bodyPr wrap="square" lIns="0" tIns="0" rIns="0" bIns="0" rtlCol="0" anchor="ctr"/>
           <a:lstStyle/>
           <a:p>
-            <a:pPr algn="r" indent="0" marL="0">
+            <a:pPr marL="0" indent="0" algn="r">
               <a:buNone/>
             </a:pPr>
             <a:r>
@@ -9984,6 +10118,13 @@
           </a:solidFill>
           <a:ln/>
         </p:spPr>
+        <p:txBody>
+          <a:bodyPr/>
+          <a:lstStyle/>
+          <a:p>
+            <a:endParaRPr lang="fr-FR"/>
+          </a:p>
+        </p:txBody>
       </p:sp>
       <p:sp>
         <p:nvSpPr>
@@ -10006,7 +10147,7 @@
           <a:bodyPr wrap="square" lIns="0" tIns="0" rIns="0" bIns="0" rtlCol="0" anchor="ctr"/>
           <a:lstStyle/>
           <a:p>
-            <a:pPr indent="0" marL="0">
+            <a:pPr marL="0" indent="0">
               <a:buNone/>
             </a:pPr>
             <a:r>
@@ -10040,6 +10181,13 @@
           </a:solidFill>
           <a:ln/>
         </p:spPr>
+        <p:txBody>
+          <a:bodyPr/>
+          <a:lstStyle/>
+          <a:p>
+            <a:endParaRPr lang="fr-FR"/>
+          </a:p>
+        </p:txBody>
       </p:sp>
       <p:sp>
         <p:nvSpPr>
@@ -10062,7 +10210,7 @@
           <a:bodyPr wrap="square" lIns="0" tIns="0" rIns="0" bIns="0" rtlCol="0" anchor="ctr"/>
           <a:lstStyle/>
           <a:p>
-            <a:pPr algn="r" indent="0" marL="0">
+            <a:pPr marL="0" indent="0" algn="r">
               <a:buNone/>
             </a:pPr>
             <a:r>
@@ -10096,6 +10244,13 @@
           </a:solidFill>
           <a:ln/>
         </p:spPr>
+        <p:txBody>
+          <a:bodyPr/>
+          <a:lstStyle/>
+          <a:p>
+            <a:endParaRPr lang="fr-FR"/>
+          </a:p>
+        </p:txBody>
       </p:sp>
       <p:sp>
         <p:nvSpPr>
@@ -10118,7 +10273,7 @@
           <a:bodyPr wrap="square" lIns="0" tIns="0" rIns="0" bIns="0" rtlCol="0" anchor="ctr"/>
           <a:lstStyle/>
           <a:p>
-            <a:pPr indent="0" marL="0">
+            <a:pPr marL="0" indent="0">
               <a:buNone/>
             </a:pPr>
             <a:r>
@@ -10152,6 +10307,13 @@
           </a:solidFill>
           <a:ln/>
         </p:spPr>
+        <p:txBody>
+          <a:bodyPr/>
+          <a:lstStyle/>
+          <a:p>
+            <a:endParaRPr lang="fr-FR"/>
+          </a:p>
+        </p:txBody>
       </p:sp>
       <p:sp>
         <p:nvSpPr>
@@ -10174,7 +10336,7 @@
           <a:bodyPr wrap="square" lIns="0" tIns="0" rIns="0" bIns="0" rtlCol="0" anchor="ctr"/>
           <a:lstStyle/>
           <a:p>
-            <a:pPr algn="r" indent="0" marL="0">
+            <a:pPr marL="0" indent="0" algn="r">
               <a:buNone/>
             </a:pPr>
             <a:r>
@@ -10208,6 +10370,13 @@
           </a:solidFill>
           <a:ln/>
         </p:spPr>
+        <p:txBody>
+          <a:bodyPr/>
+          <a:lstStyle/>
+          <a:p>
+            <a:endParaRPr lang="fr-FR"/>
+          </a:p>
+        </p:txBody>
       </p:sp>
       <p:sp>
         <p:nvSpPr>
@@ -10230,7 +10399,7 @@
           <a:bodyPr wrap="square" lIns="0" tIns="0" rIns="0" bIns="0" rtlCol="0" anchor="ctr"/>
           <a:lstStyle/>
           <a:p>
-            <a:pPr indent="0" marL="0">
+            <a:pPr marL="0" indent="0">
               <a:buNone/>
             </a:pPr>
             <a:r>
@@ -10264,6 +10433,13 @@
           </a:solidFill>
           <a:ln/>
         </p:spPr>
+        <p:txBody>
+          <a:bodyPr/>
+          <a:lstStyle/>
+          <a:p>
+            <a:endParaRPr lang="fr-FR"/>
+          </a:p>
+        </p:txBody>
       </p:sp>
       <p:sp>
         <p:nvSpPr>
@@ -10286,7 +10462,7 @@
           <a:bodyPr wrap="square" lIns="0" tIns="0" rIns="0" bIns="0" rtlCol="0" anchor="ctr"/>
           <a:lstStyle/>
           <a:p>
-            <a:pPr algn="r" indent="0" marL="0">
+            <a:pPr marL="0" indent="0" algn="r">
               <a:buNone/>
             </a:pPr>
             <a:r>
@@ -10325,6 +10501,13 @@
             <a:prstDash val="solid"/>
           </a:ln>
         </p:spPr>
+        <p:txBody>
+          <a:bodyPr/>
+          <a:lstStyle/>
+          <a:p>
+            <a:endParaRPr lang="fr-FR"/>
+          </a:p>
+        </p:txBody>
       </p:sp>
       <p:sp>
         <p:nvSpPr>
@@ -10347,7 +10530,7 @@
           <a:bodyPr wrap="square" lIns="0" tIns="0" rIns="0" bIns="0" rtlCol="0" anchor="ctr"/>
           <a:lstStyle/>
           <a:p>
-            <a:pPr indent="0" marL="0">
+            <a:pPr marL="0" indent="0">
               <a:buNone/>
             </a:pPr>
             <a:r>
@@ -10381,6 +10564,13 @@
           </a:solidFill>
           <a:ln/>
         </p:spPr>
+        <p:txBody>
+          <a:bodyPr/>
+          <a:lstStyle/>
+          <a:p>
+            <a:endParaRPr lang="fr-FR"/>
+          </a:p>
+        </p:txBody>
       </p:sp>
       <p:sp>
         <p:nvSpPr>
@@ -10403,7 +10593,7 @@
           <a:bodyPr wrap="square" lIns="0" tIns="0" rIns="0" bIns="0" rtlCol="0" anchor="ctr"/>
           <a:lstStyle/>
           <a:p>
-            <a:pPr algn="r" indent="0" marL="0">
+            <a:pPr marL="0" indent="0" algn="r">
               <a:buNone/>
             </a:pPr>
             <a:r>
@@ -10442,6 +10632,13 @@
             <a:prstDash val="solid"/>
           </a:ln>
         </p:spPr>
+        <p:txBody>
+          <a:bodyPr/>
+          <a:lstStyle/>
+          <a:p>
+            <a:endParaRPr lang="fr-FR"/>
+          </a:p>
+        </p:txBody>
       </p:sp>
       <p:sp>
         <p:nvSpPr>
@@ -10464,7 +10661,7 @@
           <a:bodyPr wrap="square" lIns="0" tIns="0" rIns="0" bIns="0" rtlCol="0" anchor="ctr"/>
           <a:lstStyle/>
           <a:p>
-            <a:pPr indent="0" marL="0">
+            <a:pPr marL="0" indent="0">
               <a:buNone/>
             </a:pPr>
             <a:r>
@@ -10495,6 +10692,7 @@
         <a:solidFill>
           <a:srgbClr val="F0F6FF"/>
         </a:solidFill>
+        <a:effectLst/>
       </p:bgPr>
     </p:bg>
     <p:spTree>
@@ -10530,6 +10728,13 @@
           </a:solidFill>
           <a:ln/>
         </p:spPr>
+        <p:txBody>
+          <a:bodyPr/>
+          <a:lstStyle/>
+          <a:p>
+            <a:endParaRPr lang="fr-FR"/>
+          </a:p>
+        </p:txBody>
       </p:sp>
       <p:sp>
         <p:nvSpPr>
@@ -10552,11 +10757,11 @@
           <a:bodyPr wrap="square" lIns="0" tIns="0" rIns="0" bIns="0" rtlCol="0" anchor="ctr"/>
           <a:lstStyle/>
           <a:p>
-            <a:pPr indent="0" marL="0">
-              <a:buNone/>
-            </a:pPr>
-            <a:r>
-              <a:rPr lang="en-US" sz="1100" b="1" spc="300" kern="0" dirty="0">
+            <a:pPr marL="0" indent="0">
+              <a:buNone/>
+            </a:pPr>
+            <a:r>
+              <a:rPr lang="en-US" sz="1100" b="1" kern="0" spc="300" dirty="0">
                 <a:solidFill>
                   <a:srgbClr val="00B4D8"/>
                 </a:solidFill>
@@ -10588,7 +10793,7 @@
           <a:bodyPr wrap="square" lIns="0" tIns="0" rIns="0" bIns="0" rtlCol="0" anchor="ctr"/>
           <a:lstStyle/>
           <a:p>
-            <a:pPr indent="0" marL="0">
+            <a:pPr marL="0" indent="0">
               <a:buNone/>
             </a:pPr>
             <a:r>
@@ -10619,18 +10824,48 @@
         </p:nvGraphicFramePr>
         <p:xfrm>
           <a:off x="320040" y="1005840"/>
-          <a:ext cx="8503920" cy="3474720"/>
+          <a:ext cx="8138160" cy="3328416"/>
         </p:xfrm>
         <a:graphic>
           <a:graphicData uri="http://schemas.openxmlformats.org/drawingml/2006/table">
             <a:tbl>
               <a:tblPr/>
               <a:tblGrid>
-                <a:gridCol w="1920240"/>
-                <a:gridCol w="2286000"/>
-                <a:gridCol w="2560320"/>
-                <a:gridCol w="457200"/>
-                <a:gridCol w="914400"/>
+                <a:gridCol w="1920240">
+                  <a:extLst>
+                    <a:ext uri="{9D8B030D-6E8A-4147-A177-3AD203B41FA5}">
+                      <a16:colId xmlns:a16="http://schemas.microsoft.com/office/drawing/2014/main" val="20000"/>
+                    </a:ext>
+                  </a:extLst>
+                </a:gridCol>
+                <a:gridCol w="2286000">
+                  <a:extLst>
+                    <a:ext uri="{9D8B030D-6E8A-4147-A177-3AD203B41FA5}">
+                      <a16:colId xmlns:a16="http://schemas.microsoft.com/office/drawing/2014/main" val="20001"/>
+                    </a:ext>
+                  </a:extLst>
+                </a:gridCol>
+                <a:gridCol w="2560320">
+                  <a:extLst>
+                    <a:ext uri="{9D8B030D-6E8A-4147-A177-3AD203B41FA5}">
+                      <a16:colId xmlns:a16="http://schemas.microsoft.com/office/drawing/2014/main" val="20002"/>
+                    </a:ext>
+                  </a:extLst>
+                </a:gridCol>
+                <a:gridCol w="457200">
+                  <a:extLst>
+                    <a:ext uri="{9D8B030D-6E8A-4147-A177-3AD203B41FA5}">
+                      <a16:colId xmlns:a16="http://schemas.microsoft.com/office/drawing/2014/main" val="20003"/>
+                    </a:ext>
+                  </a:extLst>
+                </a:gridCol>
+                <a:gridCol w="914400">
+                  <a:extLst>
+                    <a:ext uri="{9D8B030D-6E8A-4147-A177-3AD203B41FA5}">
+                      <a16:colId xmlns:a16="http://schemas.microsoft.com/office/drawing/2014/main" val="20004"/>
+                    </a:ext>
+                  </a:extLst>
+                </a:gridCol>
               </a:tblGrid>
               <a:tr h="475488">
                 <a:tc>
@@ -10638,7 +10873,7 @@
                     <a:bodyPr/>
                     <a:lstStyle/>
                     <a:p>
-                      <a:pPr indent="0" marL="0">
+                      <a:pPr marL="0" indent="0">
                         <a:buNone/>
                       </a:pPr>
                       <a:r>
@@ -10652,7 +10887,7 @@
                       <a:endParaRPr lang="en-US" sz="1200" dirty="0"/>
                     </a:p>
                   </a:txBody>
-                  <a:tcPr marL="91440" marR="91440" marT="45720" marB="45720">
+                  <a:tcPr>
                     <a:lnL w="6350" cap="flat" cmpd="sng" algn="ctr">
                       <a:solidFill>
                         <a:srgbClr val="E2E8F0"/>
@@ -10699,7 +10934,7 @@
                     <a:bodyPr/>
                     <a:lstStyle/>
                     <a:p>
-                      <a:pPr indent="0" marL="0">
+                      <a:pPr marL="0" indent="0">
                         <a:buNone/>
                       </a:pPr>
                       <a:r>
@@ -10713,7 +10948,7 @@
                       <a:endParaRPr lang="en-US" sz="1200" dirty="0"/>
                     </a:p>
                   </a:txBody>
-                  <a:tcPr marL="91440" marR="91440" marT="45720" marB="45720">
+                  <a:tcPr>
                     <a:lnL w="6350" cap="flat" cmpd="sng" algn="ctr">
                       <a:solidFill>
                         <a:srgbClr val="E2E8F0"/>
@@ -10760,7 +10995,7 @@
                     <a:bodyPr/>
                     <a:lstStyle/>
                     <a:p>
-                      <a:pPr indent="0" marL="0">
+                      <a:pPr marL="0" indent="0">
                         <a:buNone/>
                       </a:pPr>
                       <a:r>
@@ -10774,7 +11009,7 @@
                       <a:endParaRPr lang="en-US" sz="1200" dirty="0"/>
                     </a:p>
                   </a:txBody>
-                  <a:tcPr marL="91440" marR="91440" marT="45720" marB="45720">
+                  <a:tcPr>
                     <a:lnL w="6350" cap="flat" cmpd="sng" algn="ctr">
                       <a:solidFill>
                         <a:srgbClr val="E2E8F0"/>
@@ -10821,7 +11056,7 @@
                     <a:bodyPr/>
                     <a:lstStyle/>
                     <a:p>
-                      <a:pPr indent="0" marL="0">
+                      <a:pPr marL="0" indent="0">
                         <a:buNone/>
                       </a:pPr>
                       <a:r>
@@ -10835,7 +11070,7 @@
                       <a:endParaRPr lang="en-US" sz="1200" dirty="0"/>
                     </a:p>
                   </a:txBody>
-                  <a:tcPr marL="91440" marR="91440" marT="45720" marB="45720">
+                  <a:tcPr>
                     <a:lnL w="6350" cap="flat" cmpd="sng" algn="ctr">
                       <a:solidFill>
                         <a:srgbClr val="E2E8F0"/>
@@ -10882,7 +11117,7 @@
                     <a:bodyPr/>
                     <a:lstStyle/>
                     <a:p>
-                      <a:pPr indent="0" marL="0">
+                      <a:pPr marL="0" indent="0">
                         <a:buNone/>
                       </a:pPr>
                       <a:r>
@@ -10896,7 +11131,7 @@
                       <a:endParaRPr lang="en-US" sz="1200" dirty="0"/>
                     </a:p>
                   </a:txBody>
-                  <a:tcPr marL="91440" marR="91440" marT="45720" marB="45720">
+                  <a:tcPr>
                     <a:lnL w="6350" cap="flat" cmpd="sng" algn="ctr">
                       <a:solidFill>
                         <a:srgbClr val="E2E8F0"/>
@@ -10938,6 +11173,11 @@
                     </a:solidFill>
                   </a:tcPr>
                 </a:tc>
+                <a:extLst>
+                  <a:ext uri="{0D108BD9-81ED-4DB2-BD59-A6C34878D82A}">
+                    <a16:rowId xmlns:a16="http://schemas.microsoft.com/office/drawing/2014/main" val="10000"/>
+                  </a:ext>
+                </a:extLst>
               </a:tr>
               <a:tr h="475488">
                 <a:tc>
@@ -10945,7 +11185,7 @@
                     <a:bodyPr/>
                     <a:lstStyle/>
                     <a:p>
-                      <a:pPr indent="0" marL="0">
+                      <a:pPr marL="0" indent="0">
                         <a:buNone/>
                       </a:pPr>
                       <a:r>
@@ -10959,7 +11199,7 @@
                       <a:endParaRPr lang="en-US" sz="1150" dirty="0"/>
                     </a:p>
                   </a:txBody>
-                  <a:tcPr marL="91440" marR="91440" marT="45720" marB="45720">
+                  <a:tcPr>
                     <a:lnL w="6350" cap="flat" cmpd="sng" algn="ctr">
                       <a:solidFill>
                         <a:srgbClr val="E2E8F0"/>
@@ -11006,7 +11246,7 @@
                     <a:bodyPr/>
                     <a:lstStyle/>
                     <a:p>
-                      <a:pPr indent="0" marL="0">
+                      <a:pPr marL="0" indent="0">
                         <a:buNone/>
                       </a:pPr>
                       <a:r>
@@ -11020,7 +11260,7 @@
                       <a:endParaRPr lang="en-US" sz="1150" dirty="0"/>
                     </a:p>
                   </a:txBody>
-                  <a:tcPr marL="91440" marR="91440" marT="45720" marB="45720">
+                  <a:tcPr>
                     <a:lnL w="6350" cap="flat" cmpd="sng" algn="ctr">
                       <a:solidFill>
                         <a:srgbClr val="E2E8F0"/>
@@ -11067,7 +11307,7 @@
                     <a:bodyPr/>
                     <a:lstStyle/>
                     <a:p>
-                      <a:pPr indent="0" marL="0">
+                      <a:pPr marL="0" indent="0">
                         <a:buNone/>
                       </a:pPr>
                       <a:r>
@@ -11081,7 +11321,7 @@
                       <a:endParaRPr lang="en-US" sz="1150" dirty="0"/>
                     </a:p>
                   </a:txBody>
-                  <a:tcPr marL="91440" marR="91440" marT="45720" marB="45720">
+                  <a:tcPr>
                     <a:lnL w="6350" cap="flat" cmpd="sng" algn="ctr">
                       <a:solidFill>
                         <a:srgbClr val="E2E8F0"/>
@@ -11128,7 +11368,7 @@
                     <a:bodyPr/>
                     <a:lstStyle/>
                     <a:p>
-                      <a:pPr indent="0" marL="0">
+                      <a:pPr marL="0" indent="0">
                         <a:buNone/>
                       </a:pPr>
                       <a:r>
@@ -11142,7 +11382,7 @@
                       <a:endParaRPr lang="en-US" sz="1150" dirty="0"/>
                     </a:p>
                   </a:txBody>
-                  <a:tcPr marL="91440" marR="91440" marT="45720" marB="45720">
+                  <a:tcPr>
                     <a:lnL w="6350" cap="flat" cmpd="sng" algn="ctr">
                       <a:solidFill>
                         <a:srgbClr val="E2E8F0"/>
@@ -11189,7 +11429,7 @@
                     <a:bodyPr/>
                     <a:lstStyle/>
                     <a:p>
-                      <a:pPr indent="0" marL="0">
+                      <a:pPr marL="0" indent="0">
                         <a:buNone/>
                       </a:pPr>
                       <a:r>
@@ -11203,7 +11443,7 @@
                       <a:endParaRPr lang="en-US" sz="1150" dirty="0"/>
                     </a:p>
                   </a:txBody>
-                  <a:tcPr marL="91440" marR="91440" marT="45720" marB="45720">
+                  <a:tcPr>
                     <a:lnL w="6350" cap="flat" cmpd="sng" algn="ctr">
                       <a:solidFill>
                         <a:srgbClr val="E2E8F0"/>
@@ -11245,6 +11485,11 @@
                     </a:solidFill>
                   </a:tcPr>
                 </a:tc>
+                <a:extLst>
+                  <a:ext uri="{0D108BD9-81ED-4DB2-BD59-A6C34878D82A}">
+                    <a16:rowId xmlns:a16="http://schemas.microsoft.com/office/drawing/2014/main" val="10001"/>
+                  </a:ext>
+                </a:extLst>
               </a:tr>
               <a:tr h="475488">
                 <a:tc>
@@ -11252,7 +11497,7 @@
                     <a:bodyPr/>
                     <a:lstStyle/>
                     <a:p>
-                      <a:pPr indent="0" marL="0">
+                      <a:pPr marL="0" indent="0">
                         <a:buNone/>
                       </a:pPr>
                       <a:r>
@@ -11266,7 +11511,7 @@
                       <a:endParaRPr lang="en-US" sz="1150" dirty="0"/>
                     </a:p>
                   </a:txBody>
-                  <a:tcPr marL="91440" marR="91440" marT="45720" marB="45720">
+                  <a:tcPr>
                     <a:lnL w="6350" cap="flat" cmpd="sng" algn="ctr">
                       <a:solidFill>
                         <a:srgbClr val="E2E8F0"/>
@@ -11313,7 +11558,7 @@
                     <a:bodyPr/>
                     <a:lstStyle/>
                     <a:p>
-                      <a:pPr indent="0" marL="0">
+                      <a:pPr marL="0" indent="0">
                         <a:buNone/>
                       </a:pPr>
                       <a:r>
@@ -11327,7 +11572,7 @@
                       <a:endParaRPr lang="en-US" sz="1150" dirty="0"/>
                     </a:p>
                   </a:txBody>
-                  <a:tcPr marL="91440" marR="91440" marT="45720" marB="45720">
+                  <a:tcPr>
                     <a:lnL w="6350" cap="flat" cmpd="sng" algn="ctr">
                       <a:solidFill>
                         <a:srgbClr val="E2E8F0"/>
@@ -11374,7 +11619,7 @@
                     <a:bodyPr/>
                     <a:lstStyle/>
                     <a:p>
-                      <a:pPr indent="0" marL="0">
+                      <a:pPr marL="0" indent="0">
                         <a:buNone/>
                       </a:pPr>
                       <a:r>
@@ -11388,7 +11633,7 @@
                       <a:endParaRPr lang="en-US" sz="1150" dirty="0"/>
                     </a:p>
                   </a:txBody>
-                  <a:tcPr marL="91440" marR="91440" marT="45720" marB="45720">
+                  <a:tcPr>
                     <a:lnL w="6350" cap="flat" cmpd="sng" algn="ctr">
                       <a:solidFill>
                         <a:srgbClr val="E2E8F0"/>
@@ -11435,7 +11680,7 @@
                     <a:bodyPr/>
                     <a:lstStyle/>
                     <a:p>
-                      <a:pPr indent="0" marL="0">
+                      <a:pPr marL="0" indent="0">
                         <a:buNone/>
                       </a:pPr>
                       <a:r>
@@ -11449,7 +11694,7 @@
                       <a:endParaRPr lang="en-US" sz="1150" dirty="0"/>
                     </a:p>
                   </a:txBody>
-                  <a:tcPr marL="91440" marR="91440" marT="45720" marB="45720">
+                  <a:tcPr>
                     <a:lnL w="6350" cap="flat" cmpd="sng" algn="ctr">
                       <a:solidFill>
                         <a:srgbClr val="E2E8F0"/>
@@ -11496,7 +11741,7 @@
                     <a:bodyPr/>
                     <a:lstStyle/>
                     <a:p>
-                      <a:pPr indent="0" marL="0">
+                      <a:pPr marL="0" indent="0">
                         <a:buNone/>
                       </a:pPr>
                       <a:r>
@@ -11510,7 +11755,7 @@
                       <a:endParaRPr lang="en-US" sz="1150" dirty="0"/>
                     </a:p>
                   </a:txBody>
-                  <a:tcPr marL="91440" marR="91440" marT="45720" marB="45720">
+                  <a:tcPr>
                     <a:lnL w="6350" cap="flat" cmpd="sng" algn="ctr">
                       <a:solidFill>
                         <a:srgbClr val="E2E8F0"/>
@@ -11552,6 +11797,11 @@
                     </a:solidFill>
                   </a:tcPr>
                 </a:tc>
+                <a:extLst>
+                  <a:ext uri="{0D108BD9-81ED-4DB2-BD59-A6C34878D82A}">
+                    <a16:rowId xmlns:a16="http://schemas.microsoft.com/office/drawing/2014/main" val="10002"/>
+                  </a:ext>
+                </a:extLst>
               </a:tr>
               <a:tr h="475488">
                 <a:tc>
@@ -11559,7 +11809,7 @@
                     <a:bodyPr/>
                     <a:lstStyle/>
                     <a:p>
-                      <a:pPr indent="0" marL="0">
+                      <a:pPr marL="0" indent="0">
                         <a:buNone/>
                       </a:pPr>
                       <a:r>
@@ -11573,7 +11823,7 @@
                       <a:endParaRPr lang="en-US" sz="1150" dirty="0"/>
                     </a:p>
                   </a:txBody>
-                  <a:tcPr marL="91440" marR="91440" marT="45720" marB="45720">
+                  <a:tcPr>
                     <a:lnL w="6350" cap="flat" cmpd="sng" algn="ctr">
                       <a:solidFill>
                         <a:srgbClr val="E2E8F0"/>
@@ -11620,7 +11870,7 @@
                     <a:bodyPr/>
                     <a:lstStyle/>
                     <a:p>
-                      <a:pPr indent="0" marL="0">
+                      <a:pPr marL="0" indent="0">
                         <a:buNone/>
                       </a:pPr>
                       <a:r>
@@ -11634,7 +11884,7 @@
                       <a:endParaRPr lang="en-US" sz="1150" dirty="0"/>
                     </a:p>
                   </a:txBody>
-                  <a:tcPr marL="91440" marR="91440" marT="45720" marB="45720">
+                  <a:tcPr>
                     <a:lnL w="6350" cap="flat" cmpd="sng" algn="ctr">
                       <a:solidFill>
                         <a:srgbClr val="E2E8F0"/>
@@ -11681,7 +11931,7 @@
                     <a:bodyPr/>
                     <a:lstStyle/>
                     <a:p>
-                      <a:pPr indent="0" marL="0">
+                      <a:pPr marL="0" indent="0">
                         <a:buNone/>
                       </a:pPr>
                       <a:r>
@@ -11695,7 +11945,7 @@
                       <a:endParaRPr lang="en-US" sz="1150" dirty="0"/>
                     </a:p>
                   </a:txBody>
-                  <a:tcPr marL="91440" marR="91440" marT="45720" marB="45720">
+                  <a:tcPr>
                     <a:lnL w="6350" cap="flat" cmpd="sng" algn="ctr">
                       <a:solidFill>
                         <a:srgbClr val="E2E8F0"/>
@@ -11742,7 +11992,7 @@
                     <a:bodyPr/>
                     <a:lstStyle/>
                     <a:p>
-                      <a:pPr indent="0" marL="0">
+                      <a:pPr marL="0" indent="0">
                         <a:buNone/>
                       </a:pPr>
                       <a:r>
@@ -11756,7 +12006,7 @@
                       <a:endParaRPr lang="en-US" sz="1150" dirty="0"/>
                     </a:p>
                   </a:txBody>
-                  <a:tcPr marL="91440" marR="91440" marT="45720" marB="45720">
+                  <a:tcPr>
                     <a:lnL w="6350" cap="flat" cmpd="sng" algn="ctr">
                       <a:solidFill>
                         <a:srgbClr val="E2E8F0"/>
@@ -11803,7 +12053,7 @@
                     <a:bodyPr/>
                     <a:lstStyle/>
                     <a:p>
-                      <a:pPr indent="0" marL="0">
+                      <a:pPr marL="0" indent="0">
                         <a:buNone/>
                       </a:pPr>
                       <a:r>
@@ -11817,7 +12067,7 @@
                       <a:endParaRPr lang="en-US" sz="1150" dirty="0"/>
                     </a:p>
                   </a:txBody>
-                  <a:tcPr marL="91440" marR="91440" marT="45720" marB="45720">
+                  <a:tcPr>
                     <a:lnL w="6350" cap="flat" cmpd="sng" algn="ctr">
                       <a:solidFill>
                         <a:srgbClr val="E2E8F0"/>
@@ -11859,6 +12109,11 @@
                     </a:solidFill>
                   </a:tcPr>
                 </a:tc>
+                <a:extLst>
+                  <a:ext uri="{0D108BD9-81ED-4DB2-BD59-A6C34878D82A}">
+                    <a16:rowId xmlns:a16="http://schemas.microsoft.com/office/drawing/2014/main" val="10003"/>
+                  </a:ext>
+                </a:extLst>
               </a:tr>
               <a:tr h="475488">
                 <a:tc>
@@ -11866,7 +12121,7 @@
                     <a:bodyPr/>
                     <a:lstStyle/>
                     <a:p>
-                      <a:pPr indent="0" marL="0">
+                      <a:pPr marL="0" indent="0">
                         <a:buNone/>
                       </a:pPr>
                       <a:r>
@@ -11880,7 +12135,7 @@
                       <a:endParaRPr lang="en-US" sz="1150" dirty="0"/>
                     </a:p>
                   </a:txBody>
-                  <a:tcPr marL="91440" marR="91440" marT="45720" marB="45720">
+                  <a:tcPr>
                     <a:lnL w="6350" cap="flat" cmpd="sng" algn="ctr">
                       <a:solidFill>
                         <a:srgbClr val="E2E8F0"/>
@@ -11927,7 +12182,7 @@
                     <a:bodyPr/>
                     <a:lstStyle/>
                     <a:p>
-                      <a:pPr indent="0" marL="0">
+                      <a:pPr marL="0" indent="0">
                         <a:buNone/>
                       </a:pPr>
                       <a:r>
@@ -11941,7 +12196,7 @@
                       <a:endParaRPr lang="en-US" sz="1150" dirty="0"/>
                     </a:p>
                   </a:txBody>
-                  <a:tcPr marL="91440" marR="91440" marT="45720" marB="45720">
+                  <a:tcPr>
                     <a:lnL w="6350" cap="flat" cmpd="sng" algn="ctr">
                       <a:solidFill>
                         <a:srgbClr val="E2E8F0"/>
@@ -11988,7 +12243,7 @@
                     <a:bodyPr/>
                     <a:lstStyle/>
                     <a:p>
-                      <a:pPr indent="0" marL="0">
+                      <a:pPr marL="0" indent="0">
                         <a:buNone/>
                       </a:pPr>
                       <a:r>
@@ -12002,7 +12257,7 @@
                       <a:endParaRPr lang="en-US" sz="1150" dirty="0"/>
                     </a:p>
                   </a:txBody>
-                  <a:tcPr marL="91440" marR="91440" marT="45720" marB="45720">
+                  <a:tcPr>
                     <a:lnL w="6350" cap="flat" cmpd="sng" algn="ctr">
                       <a:solidFill>
                         <a:srgbClr val="E2E8F0"/>
@@ -12049,7 +12304,7 @@
                     <a:bodyPr/>
                     <a:lstStyle/>
                     <a:p>
-                      <a:pPr indent="0" marL="0">
+                      <a:pPr marL="0" indent="0">
                         <a:buNone/>
                       </a:pPr>
                       <a:r>
@@ -12063,7 +12318,7 @@
                       <a:endParaRPr lang="en-US" sz="1150" dirty="0"/>
                     </a:p>
                   </a:txBody>
-                  <a:tcPr marL="91440" marR="91440" marT="45720" marB="45720">
+                  <a:tcPr>
                     <a:lnL w="6350" cap="flat" cmpd="sng" algn="ctr">
                       <a:solidFill>
                         <a:srgbClr val="E2E8F0"/>
@@ -12110,7 +12365,7 @@
                     <a:bodyPr/>
                     <a:lstStyle/>
                     <a:p>
-                      <a:pPr indent="0" marL="0">
+                      <a:pPr marL="0" indent="0">
                         <a:buNone/>
                       </a:pPr>
                       <a:r>
@@ -12124,7 +12379,7 @@
                       <a:endParaRPr lang="en-US" sz="1150" dirty="0"/>
                     </a:p>
                   </a:txBody>
-                  <a:tcPr marL="91440" marR="91440" marT="45720" marB="45720">
+                  <a:tcPr>
                     <a:lnL w="6350" cap="flat" cmpd="sng" algn="ctr">
                       <a:solidFill>
                         <a:srgbClr val="E2E8F0"/>
@@ -12166,6 +12421,11 @@
                     </a:solidFill>
                   </a:tcPr>
                 </a:tc>
+                <a:extLst>
+                  <a:ext uri="{0D108BD9-81ED-4DB2-BD59-A6C34878D82A}">
+                    <a16:rowId xmlns:a16="http://schemas.microsoft.com/office/drawing/2014/main" val="10004"/>
+                  </a:ext>
+                </a:extLst>
               </a:tr>
               <a:tr h="475488">
                 <a:tc>
@@ -12173,7 +12433,7 @@
                     <a:bodyPr/>
                     <a:lstStyle/>
                     <a:p>
-                      <a:pPr indent="0" marL="0">
+                      <a:pPr marL="0" indent="0">
                         <a:buNone/>
                       </a:pPr>
                       <a:r>
@@ -12187,7 +12447,7 @@
                       <a:endParaRPr lang="en-US" sz="1150" dirty="0"/>
                     </a:p>
                   </a:txBody>
-                  <a:tcPr marL="91440" marR="91440" marT="45720" marB="45720">
+                  <a:tcPr>
                     <a:lnL w="6350" cap="flat" cmpd="sng" algn="ctr">
                       <a:solidFill>
                         <a:srgbClr val="E2E8F0"/>
@@ -12234,7 +12494,7 @@
                     <a:bodyPr/>
                     <a:lstStyle/>
                     <a:p>
-                      <a:pPr indent="0" marL="0">
+                      <a:pPr marL="0" indent="0">
                         <a:buNone/>
                       </a:pPr>
                       <a:r>
@@ -12248,7 +12508,7 @@
                       <a:endParaRPr lang="en-US" sz="1150" dirty="0"/>
                     </a:p>
                   </a:txBody>
-                  <a:tcPr marL="91440" marR="91440" marT="45720" marB="45720">
+                  <a:tcPr>
                     <a:lnL w="6350" cap="flat" cmpd="sng" algn="ctr">
                       <a:solidFill>
                         <a:srgbClr val="E2E8F0"/>
@@ -12295,7 +12555,7 @@
                     <a:bodyPr/>
                     <a:lstStyle/>
                     <a:p>
-                      <a:pPr indent="0" marL="0">
+                      <a:pPr marL="0" indent="0">
                         <a:buNone/>
                       </a:pPr>
                       <a:r>
@@ -12309,7 +12569,7 @@
                       <a:endParaRPr lang="en-US" sz="1150" dirty="0"/>
                     </a:p>
                   </a:txBody>
-                  <a:tcPr marL="91440" marR="91440" marT="45720" marB="45720">
+                  <a:tcPr>
                     <a:lnL w="6350" cap="flat" cmpd="sng" algn="ctr">
                       <a:solidFill>
                         <a:srgbClr val="E2E8F0"/>
@@ -12356,7 +12616,7 @@
                     <a:bodyPr/>
                     <a:lstStyle/>
                     <a:p>
-                      <a:pPr indent="0" marL="0">
+                      <a:pPr marL="0" indent="0">
                         <a:buNone/>
                       </a:pPr>
                       <a:r>
@@ -12370,7 +12630,7 @@
                       <a:endParaRPr lang="en-US" sz="1150" dirty="0"/>
                     </a:p>
                   </a:txBody>
-                  <a:tcPr marL="91440" marR="91440" marT="45720" marB="45720">
+                  <a:tcPr>
                     <a:lnL w="6350" cap="flat" cmpd="sng" algn="ctr">
                       <a:solidFill>
                         <a:srgbClr val="E2E8F0"/>
@@ -12417,7 +12677,7 @@
                     <a:bodyPr/>
                     <a:lstStyle/>
                     <a:p>
-                      <a:pPr indent="0" marL="0">
+                      <a:pPr marL="0" indent="0">
                         <a:buNone/>
                       </a:pPr>
                       <a:r>
@@ -12431,7 +12691,7 @@
                       <a:endParaRPr lang="en-US" sz="1150" dirty="0"/>
                     </a:p>
                   </a:txBody>
-                  <a:tcPr marL="91440" marR="91440" marT="45720" marB="45720">
+                  <a:tcPr>
                     <a:lnL w="6350" cap="flat" cmpd="sng" algn="ctr">
                       <a:solidFill>
                         <a:srgbClr val="E2E8F0"/>
@@ -12473,6 +12733,11 @@
                     </a:solidFill>
                   </a:tcPr>
                 </a:tc>
+                <a:extLst>
+                  <a:ext uri="{0D108BD9-81ED-4DB2-BD59-A6C34878D82A}">
+                    <a16:rowId xmlns:a16="http://schemas.microsoft.com/office/drawing/2014/main" val="10005"/>
+                  </a:ext>
+                </a:extLst>
               </a:tr>
               <a:tr h="475488">
                 <a:tc>
@@ -12480,7 +12745,7 @@
                     <a:bodyPr/>
                     <a:lstStyle/>
                     <a:p>
-                      <a:pPr indent="0" marL="0">
+                      <a:pPr marL="0" indent="0">
                         <a:buNone/>
                       </a:pPr>
                       <a:r>
@@ -12494,7 +12759,7 @@
                       <a:endParaRPr lang="en-US" sz="1150" dirty="0"/>
                     </a:p>
                   </a:txBody>
-                  <a:tcPr marL="91440" marR="91440" marT="45720" marB="45720">
+                  <a:tcPr>
                     <a:lnL w="6350" cap="flat" cmpd="sng" algn="ctr">
                       <a:solidFill>
                         <a:srgbClr val="E2E8F0"/>
@@ -12541,7 +12806,7 @@
                     <a:bodyPr/>
                     <a:lstStyle/>
                     <a:p>
-                      <a:pPr indent="0" marL="0">
+                      <a:pPr marL="0" indent="0">
                         <a:buNone/>
                       </a:pPr>
                       <a:r>
@@ -12555,7 +12820,7 @@
                       <a:endParaRPr lang="en-US" sz="1150" dirty="0"/>
                     </a:p>
                   </a:txBody>
-                  <a:tcPr marL="91440" marR="91440" marT="45720" marB="45720">
+                  <a:tcPr>
                     <a:lnL w="6350" cap="flat" cmpd="sng" algn="ctr">
                       <a:solidFill>
                         <a:srgbClr val="E2E8F0"/>
@@ -12602,7 +12867,7 @@
                     <a:bodyPr/>
                     <a:lstStyle/>
                     <a:p>
-                      <a:pPr indent="0" marL="0">
+                      <a:pPr marL="0" indent="0">
                         <a:buNone/>
                       </a:pPr>
                       <a:r>
@@ -12616,7 +12881,7 @@
                       <a:endParaRPr lang="en-US" sz="1150" dirty="0"/>
                     </a:p>
                   </a:txBody>
-                  <a:tcPr marL="91440" marR="91440" marT="45720" marB="45720">
+                  <a:tcPr>
                     <a:lnL w="6350" cap="flat" cmpd="sng" algn="ctr">
                       <a:solidFill>
                         <a:srgbClr val="E2E8F0"/>
@@ -12663,7 +12928,7 @@
                     <a:bodyPr/>
                     <a:lstStyle/>
                     <a:p>
-                      <a:pPr indent="0" marL="0">
+                      <a:pPr marL="0" indent="0">
                         <a:buNone/>
                       </a:pPr>
                       <a:r>
@@ -12677,7 +12942,7 @@
                       <a:endParaRPr lang="en-US" sz="1150" dirty="0"/>
                     </a:p>
                   </a:txBody>
-                  <a:tcPr marL="91440" marR="91440" marT="45720" marB="45720">
+                  <a:tcPr>
                     <a:lnL w="6350" cap="flat" cmpd="sng" algn="ctr">
                       <a:solidFill>
                         <a:srgbClr val="E2E8F0"/>
@@ -12724,7 +12989,7 @@
                     <a:bodyPr/>
                     <a:lstStyle/>
                     <a:p>
-                      <a:pPr indent="0" marL="0">
+                      <a:pPr marL="0" indent="0">
                         <a:buNone/>
                       </a:pPr>
                       <a:r>
@@ -12738,7 +13003,7 @@
                       <a:endParaRPr lang="en-US" sz="1150" dirty="0"/>
                     </a:p>
                   </a:txBody>
-                  <a:tcPr marL="91440" marR="91440" marT="45720" marB="45720">
+                  <a:tcPr>
                     <a:lnL w="6350" cap="flat" cmpd="sng" algn="ctr">
                       <a:solidFill>
                         <a:srgbClr val="E2E8F0"/>
@@ -12780,6 +13045,11 @@
                     </a:solidFill>
                   </a:tcPr>
                 </a:tc>
+                <a:extLst>
+                  <a:ext uri="{0D108BD9-81ED-4DB2-BD59-A6C34878D82A}">
+                    <a16:rowId xmlns:a16="http://schemas.microsoft.com/office/drawing/2014/main" val="10006"/>
+                  </a:ext>
+                </a:extLst>
               </a:tr>
             </a:tbl>
           </a:graphicData>
@@ -12809,6 +13079,13 @@
             <a:prstDash val="solid"/>
           </a:ln>
         </p:spPr>
+        <p:txBody>
+          <a:bodyPr/>
+          <a:lstStyle/>
+          <a:p>
+            <a:endParaRPr lang="fr-FR"/>
+          </a:p>
+        </p:txBody>
       </p:sp>
       <p:sp>
         <p:nvSpPr>
@@ -12831,7 +13108,7 @@
           <a:bodyPr wrap="square" lIns="0" tIns="0" rIns="0" bIns="0" rtlCol="0" anchor="ctr"/>
           <a:lstStyle/>
           <a:p>
-            <a:pPr indent="0" marL="0">
+            <a:pPr marL="0" indent="0">
               <a:buNone/>
             </a:pPr>
             <a:r>
@@ -12862,6 +13139,7 @@
         <a:solidFill>
           <a:srgbClr val="F0F6FF"/>
         </a:solidFill>
+        <a:effectLst/>
       </p:bgPr>
     </p:bg>
     <p:spTree>
@@ -12897,6 +13175,13 @@
           </a:solidFill>
           <a:ln/>
         </p:spPr>
+        <p:txBody>
+          <a:bodyPr/>
+          <a:lstStyle/>
+          <a:p>
+            <a:endParaRPr lang="fr-FR"/>
+          </a:p>
+        </p:txBody>
       </p:sp>
       <p:sp>
         <p:nvSpPr>
@@ -12919,11 +13204,11 @@
           <a:bodyPr wrap="square" lIns="0" tIns="0" rIns="0" bIns="0" rtlCol="0" anchor="ctr"/>
           <a:lstStyle/>
           <a:p>
-            <a:pPr indent="0" marL="0">
-              <a:buNone/>
-            </a:pPr>
-            <a:r>
-              <a:rPr lang="en-US" sz="1100" b="1" spc="300" kern="0" dirty="0">
+            <a:pPr marL="0" indent="0">
+              <a:buNone/>
+            </a:pPr>
+            <a:r>
+              <a:rPr lang="en-US" sz="1100" b="1" kern="0" spc="300" dirty="0">
                 <a:solidFill>
                   <a:srgbClr val="00B4D8"/>
                 </a:solidFill>
@@ -12955,7 +13240,7 @@
           <a:bodyPr wrap="square" lIns="0" tIns="0" rIns="0" bIns="0" rtlCol="0" anchor="ctr"/>
           <a:lstStyle/>
           <a:p>
-            <a:pPr indent="0" marL="0">
+            <a:pPr marL="0" indent="0">
               <a:buNone/>
             </a:pPr>
             <a:r>
@@ -12989,13 +13274,20 @@
           </a:solidFill>
           <a:ln/>
           <a:effectLst>
-            <a:outerShdw sx="100000" sy="100000" kx="0" ky="0" algn="bl" rotWithShape="0" blurRad="101600" dist="38100" dir="8100000">
+            <a:outerShdw blurRad="101600" dist="38100" dir="8100000" algn="bl" rotWithShape="0">
               <a:srgbClr val="000000">
                 <a:alpha val="12000"/>
               </a:srgbClr>
             </a:outerShdw>
           </a:effectLst>
         </p:spPr>
+        <p:txBody>
+          <a:bodyPr/>
+          <a:lstStyle/>
+          <a:p>
+            <a:endParaRPr lang="fr-FR"/>
+          </a:p>
+        </p:txBody>
       </p:sp>
       <p:sp>
         <p:nvSpPr>
@@ -13016,6 +13308,13 @@
           </a:solidFill>
           <a:ln/>
         </p:spPr>
+        <p:txBody>
+          <a:bodyPr/>
+          <a:lstStyle/>
+          <a:p>
+            <a:endParaRPr lang="fr-FR"/>
+          </a:p>
+        </p:txBody>
       </p:sp>
       <p:sp>
         <p:nvSpPr>
@@ -13038,7 +13337,7 @@
           <a:bodyPr wrap="square" lIns="0" tIns="0" rIns="0" bIns="0" rtlCol="0" anchor="ctr"/>
           <a:lstStyle/>
           <a:p>
-            <a:pPr indent="0" marL="0">
+            <a:pPr marL="0" indent="0">
               <a:buNone/>
             </a:pPr>
             <a:r>
@@ -13074,7 +13373,7 @@
           <a:bodyPr wrap="square" lIns="0" tIns="0" rIns="0" bIns="0" rtlCol="0" anchor="ctr"/>
           <a:lstStyle/>
           <a:p>
-            <a:pPr indent="0" marL="0">
+            <a:pPr marL="0" indent="0">
               <a:buNone/>
             </a:pPr>
             <a:r>
@@ -13110,7 +13409,7 @@
           <a:bodyPr wrap="square" lIns="0" tIns="0" rIns="0" bIns="0" rtlCol="0" anchor="ctr"/>
           <a:lstStyle/>
           <a:p>
-            <a:pPr indent="0" marL="0">
+            <a:pPr marL="0" indent="0">
               <a:lnSpc>
                 <a:spcPct val="150000"/>
               </a:lnSpc>
@@ -13149,7 +13448,7 @@
           <a:bodyPr wrap="square" lIns="0" tIns="0" rIns="0" bIns="0" rtlCol="0" anchor="ctr"/>
           <a:lstStyle/>
           <a:p>
-            <a:pPr indent="0" marL="0">
+            <a:pPr marL="0" indent="0">
               <a:buNone/>
             </a:pPr>
             <a:r>
@@ -13185,7 +13484,7 @@
           <a:bodyPr wrap="square" lIns="0" tIns="0" rIns="0" bIns="0" rtlCol="0" anchor="ctr"/>
           <a:lstStyle/>
           <a:p>
-            <a:pPr indent="0" marL="0">
+            <a:pPr marL="0" indent="0">
               <a:lnSpc>
                 <a:spcPct val="120000"/>
               </a:lnSpc>
@@ -13199,19 +13498,60 @@
               </a:rPr>
               <a:t>›  </a:t>
             </a:r>
-            <a:pPr indent="0" marL="0">
+            <a:r>
+              <a:rPr lang="en-US" sz="1200" dirty="0">
+                <a:solidFill>
+                  <a:srgbClr val="1E293B"/>
+                </a:solidFill>
+              </a:rPr>
+              <a:t>Vérifie que le modèle regarde les lésions (et non le bruit d'image)</a:t>
+            </a:r>
+            <a:endParaRPr lang="en-US" sz="1200" dirty="0"/>
+          </a:p>
+        </p:txBody>
+      </p:sp>
+      <p:sp>
+        <p:nvSpPr>
+          <p:cNvPr id="12" name="Text 10"/>
+          <p:cNvSpPr/>
+          <p:nvPr/>
+        </p:nvSpPr>
+        <p:spPr>
+          <a:xfrm>
+            <a:off x="457200" y="3721608"/>
+            <a:ext cx="3840480" cy="457200"/>
+          </a:xfrm>
+          <a:prstGeom prst="rect">
+            <a:avLst/>
+          </a:prstGeom>
+          <a:noFill/>
+          <a:ln/>
+        </p:spPr>
+        <p:txBody>
+          <a:bodyPr wrap="square" lIns="0" tIns="0" rIns="0" bIns="0" rtlCol="0" anchor="ctr"/>
+          <a:lstStyle/>
+          <a:p>
+            <a:pPr marL="0" indent="0">
               <a:lnSpc>
                 <a:spcPct val="120000"/>
               </a:lnSpc>
               <a:buNone/>
             </a:pPr>
             <a:r>
+              <a:rPr lang="en-US" sz="1200" b="1" dirty="0">
+                <a:solidFill>
+                  <a:srgbClr val="7C3AED"/>
+                </a:solidFill>
+              </a:rPr>
+              <a:t>›  </a:t>
+            </a:r>
+            <a:r>
               <a:rPr lang="en-US" sz="1200" dirty="0">
                 <a:solidFill>
                   <a:srgbClr val="1E293B"/>
                 </a:solidFill>
               </a:rPr>
-              <a:t>Vérifie que le modèle regarde les lésions (et non le bruit d'image)</a:t>
+              <a:t>Renforce la confiance clinique dans les prédictions</a:t>
             </a:r>
             <a:endParaRPr lang="en-US" sz="1200" dirty="0"/>
           </a:p>
@@ -13219,13 +13559,13 @@
       </p:sp>
       <p:sp>
         <p:nvSpPr>
-          <p:cNvPr id="12" name="Text 10"/>
-          <p:cNvSpPr/>
-          <p:nvPr/>
-        </p:nvSpPr>
-        <p:spPr>
-          <a:xfrm>
-            <a:off x="457200" y="3721608"/>
+          <p:cNvPr id="13" name="Text 11"/>
+          <p:cNvSpPr/>
+          <p:nvPr/>
+        </p:nvSpPr>
+        <p:spPr>
+          <a:xfrm>
+            <a:off x="457200" y="4197096"/>
             <a:ext cx="3840480" cy="457200"/>
           </a:xfrm>
           <a:prstGeom prst="rect">
@@ -13238,7 +13578,7 @@
           <a:bodyPr wrap="square" lIns="0" tIns="0" rIns="0" bIns="0" rtlCol="0" anchor="ctr"/>
           <a:lstStyle/>
           <a:p>
-            <a:pPr indent="0" marL="0">
+            <a:pPr marL="0" indent="0">
               <a:lnSpc>
                 <a:spcPct val="120000"/>
               </a:lnSpc>
@@ -13252,65 +13592,6 @@
               </a:rPr>
               <a:t>›  </a:t>
             </a:r>
-            <a:pPr indent="0" marL="0">
-              <a:lnSpc>
-                <a:spcPct val="120000"/>
-              </a:lnSpc>
-              <a:buNone/>
-            </a:pPr>
-            <a:r>
-              <a:rPr lang="en-US" sz="1200" dirty="0">
-                <a:solidFill>
-                  <a:srgbClr val="1E293B"/>
-                </a:solidFill>
-              </a:rPr>
-              <a:t>Renforce la confiance clinique dans les prédictions</a:t>
-            </a:r>
-            <a:endParaRPr lang="en-US" sz="1200" dirty="0"/>
-          </a:p>
-        </p:txBody>
-      </p:sp>
-      <p:sp>
-        <p:nvSpPr>
-          <p:cNvPr id="13" name="Text 11"/>
-          <p:cNvSpPr/>
-          <p:nvPr/>
-        </p:nvSpPr>
-        <p:spPr>
-          <a:xfrm>
-            <a:off x="457200" y="4197096"/>
-            <a:ext cx="3840480" cy="457200"/>
-          </a:xfrm>
-          <a:prstGeom prst="rect">
-            <a:avLst/>
-          </a:prstGeom>
-          <a:noFill/>
-          <a:ln/>
-        </p:spPr>
-        <p:txBody>
-          <a:bodyPr wrap="square" lIns="0" tIns="0" rIns="0" bIns="0" rtlCol="0" anchor="ctr"/>
-          <a:lstStyle/>
-          <a:p>
-            <a:pPr indent="0" marL="0">
-              <a:lnSpc>
-                <a:spcPct val="120000"/>
-              </a:lnSpc>
-              <a:buNone/>
-            </a:pPr>
-            <a:r>
-              <a:rPr lang="en-US" sz="1200" b="1" dirty="0">
-                <a:solidFill>
-                  <a:srgbClr val="7C3AED"/>
-                </a:solidFill>
-              </a:rPr>
-              <a:t>›  </a:t>
-            </a:r>
-            <a:pPr indent="0" marL="0">
-              <a:lnSpc>
-                <a:spcPct val="120000"/>
-              </a:lnSpc>
-              <a:buNone/>
-            </a:pPr>
             <a:r>
               <a:rPr lang="en-US" sz="1200" dirty="0">
                 <a:solidFill>
@@ -13342,13 +13623,20 @@
           </a:solidFill>
           <a:ln/>
           <a:effectLst>
-            <a:outerShdw sx="100000" sy="100000" kx="0" ky="0" algn="bl" rotWithShape="0" blurRad="101600" dist="38100" dir="8100000">
+            <a:outerShdw blurRad="101600" dist="38100" dir="8100000" algn="bl" rotWithShape="0">
               <a:srgbClr val="000000">
                 <a:alpha val="12000"/>
               </a:srgbClr>
             </a:outerShdw>
           </a:effectLst>
         </p:spPr>
+        <p:txBody>
+          <a:bodyPr/>
+          <a:lstStyle/>
+          <a:p>
+            <a:endParaRPr lang="fr-FR"/>
+          </a:p>
+        </p:txBody>
       </p:sp>
       <p:sp>
         <p:nvSpPr>
@@ -13369,6 +13657,13 @@
           </a:solidFill>
           <a:ln/>
         </p:spPr>
+        <p:txBody>
+          <a:bodyPr/>
+          <a:lstStyle/>
+          <a:p>
+            <a:endParaRPr lang="fr-FR"/>
+          </a:p>
+        </p:txBody>
       </p:sp>
       <p:sp>
         <p:nvSpPr>
@@ -13391,7 +13686,7 @@
           <a:bodyPr wrap="square" lIns="0" tIns="0" rIns="0" bIns="0" rtlCol="0" anchor="ctr"/>
           <a:lstStyle/>
           <a:p>
-            <a:pPr indent="0" marL="0">
+            <a:pPr marL="0" indent="0">
               <a:buNone/>
             </a:pPr>
             <a:r>
@@ -13430,6 +13725,13 @@
             <a:prstDash val="solid"/>
           </a:ln>
         </p:spPr>
+        <p:txBody>
+          <a:bodyPr/>
+          <a:lstStyle/>
+          <a:p>
+            <a:endParaRPr lang="fr-FR"/>
+          </a:p>
+        </p:txBody>
       </p:sp>
       <p:sp>
         <p:nvSpPr>
@@ -13452,7 +13754,7 @@
           <a:bodyPr wrap="square" lIns="0" tIns="0" rIns="0" bIns="0" rtlCol="0" anchor="ctr"/>
           <a:lstStyle/>
           <a:p>
-            <a:pPr algn="ctr" indent="0" marL="0">
+            <a:pPr marL="0" indent="0" algn="ctr">
               <a:buNone/>
             </a:pPr>
             <a:r>
@@ -13488,7 +13790,7 @@
           <a:bodyPr wrap="square" lIns="0" tIns="0" rIns="0" bIns="0" rtlCol="0" anchor="ctr"/>
           <a:lstStyle/>
           <a:p>
-            <a:pPr algn="ctr" indent="0" marL="0">
+            <a:pPr marL="0" indent="0" algn="ctr">
               <a:buNone/>
             </a:pPr>
             <a:r>
@@ -13527,6 +13829,13 @@
             <a:prstDash val="solid"/>
           </a:ln>
         </p:spPr>
+        <p:txBody>
+          <a:bodyPr/>
+          <a:lstStyle/>
+          <a:p>
+            <a:endParaRPr lang="fr-FR"/>
+          </a:p>
+        </p:txBody>
       </p:sp>
       <p:sp>
         <p:nvSpPr>
@@ -13549,7 +13858,7 @@
           <a:bodyPr wrap="square" lIns="0" tIns="0" rIns="0" bIns="0" rtlCol="0" anchor="ctr"/>
           <a:lstStyle/>
           <a:p>
-            <a:pPr algn="ctr" indent="0" marL="0">
+            <a:pPr marL="0" indent="0" algn="ctr">
               <a:buNone/>
             </a:pPr>
             <a:r>
@@ -13585,7 +13894,7 @@
           <a:bodyPr wrap="square" lIns="0" tIns="0" rIns="0" bIns="0" rtlCol="0" anchor="ctr"/>
           <a:lstStyle/>
           <a:p>
-            <a:pPr algn="ctr" indent="0" marL="0">
+            <a:pPr marL="0" indent="0" algn="ctr">
               <a:buNone/>
             </a:pPr>
             <a:r>
@@ -13624,6 +13933,13 @@
             <a:prstDash val="solid"/>
           </a:ln>
         </p:spPr>
+        <p:txBody>
+          <a:bodyPr/>
+          <a:lstStyle/>
+          <a:p>
+            <a:endParaRPr lang="fr-FR"/>
+          </a:p>
+        </p:txBody>
       </p:sp>
       <p:sp>
         <p:nvSpPr>
@@ -13646,7 +13962,7 @@
           <a:bodyPr wrap="square" lIns="0" tIns="0" rIns="0" bIns="0" rtlCol="0" anchor="ctr"/>
           <a:lstStyle/>
           <a:p>
-            <a:pPr algn="ctr" indent="0" marL="0">
+            <a:pPr marL="0" indent="0" algn="ctr">
               <a:buNone/>
             </a:pPr>
             <a:r>
@@ -13682,7 +13998,7 @@
           <a:bodyPr wrap="square" lIns="0" tIns="0" rIns="0" bIns="0" rtlCol="0" anchor="ctr"/>
           <a:lstStyle/>
           <a:p>
-            <a:pPr algn="ctr" indent="0" marL="0">
+            <a:pPr marL="0" indent="0" algn="ctr">
               <a:buNone/>
             </a:pPr>
             <a:r>
@@ -13721,6 +14037,13 @@
             <a:prstDash val="solid"/>
           </a:ln>
         </p:spPr>
+        <p:txBody>
+          <a:bodyPr/>
+          <a:lstStyle/>
+          <a:p>
+            <a:endParaRPr lang="fr-FR"/>
+          </a:p>
+        </p:txBody>
       </p:sp>
       <p:sp>
         <p:nvSpPr>
@@ -13743,7 +14066,7 @@
           <a:bodyPr wrap="square" lIns="0" tIns="0" rIns="0" bIns="0" rtlCol="0" anchor="ctr"/>
           <a:lstStyle/>
           <a:p>
-            <a:pPr algn="ctr" indent="0" marL="0">
+            <a:pPr marL="0" indent="0" algn="ctr">
               <a:buNone/>
             </a:pPr>
             <a:r>
@@ -13779,7 +14102,7 @@
           <a:bodyPr wrap="square" lIns="0" tIns="0" rIns="0" bIns="0" rtlCol="0" anchor="ctr"/>
           <a:lstStyle/>
           <a:p>
-            <a:pPr algn="ctr" indent="0" marL="0">
+            <a:pPr marL="0" indent="0" algn="ctr">
               <a:buNone/>
             </a:pPr>
             <a:r>
@@ -13815,7 +14138,7 @@
           <a:bodyPr wrap="square" lIns="0" tIns="0" rIns="0" bIns="0" rtlCol="0" anchor="ctr"/>
           <a:lstStyle/>
           <a:p>
-            <a:pPr algn="ctr" indent="0" marL="0">
+            <a:pPr marL="0" indent="0" algn="ctr">
               <a:buNone/>
             </a:pPr>
             <a:r>
@@ -13849,13 +14172,20 @@
           </a:solidFill>
           <a:ln/>
           <a:effectLst>
-            <a:outerShdw sx="100000" sy="100000" kx="0" ky="0" algn="bl" rotWithShape="0" blurRad="101600" dist="38100" dir="8100000">
+            <a:outerShdw blurRad="101600" dist="38100" dir="8100000" algn="bl" rotWithShape="0">
               <a:srgbClr val="000000">
                 <a:alpha val="12000"/>
               </a:srgbClr>
             </a:outerShdw>
           </a:effectLst>
         </p:spPr>
+        <p:txBody>
+          <a:bodyPr/>
+          <a:lstStyle/>
+          <a:p>
+            <a:endParaRPr lang="fr-FR"/>
+          </a:p>
+        </p:txBody>
       </p:sp>
       <p:sp>
         <p:nvSpPr>
@@ -13878,7 +14208,7 @@
           <a:bodyPr wrap="square" lIns="0" tIns="0" rIns="0" bIns="0" rtlCol="0" anchor="ctr"/>
           <a:lstStyle/>
           <a:p>
-            <a:pPr algn="ctr" indent="0" marL="0">
+            <a:pPr marL="0" indent="0" algn="ctr">
               <a:lnSpc>
                 <a:spcPct val="130000"/>
               </a:lnSpc>
@@ -13895,7 +14225,7 @@
             <a:endParaRPr lang="en-US" sz="1200" dirty="0"/>
           </a:p>
           <a:p>
-            <a:pPr algn="ctr" indent="0" marL="0">
+            <a:pPr marL="0" indent="0" algn="ctr">
               <a:lnSpc>
                 <a:spcPct val="130000"/>
               </a:lnSpc>
@@ -14214,4 +14544,319 @@
     </a:ext>
   </a:extLst>
 </a:theme>
+</file>
+
+<file path=ppt/theme/theme2.xml><?xml version="1.0" encoding="utf-8"?>
+<a:theme xmlns:a="http://schemas.openxmlformats.org/drawingml/2006/main" name="Thème Office">
+  <a:themeElements>
+    <a:clrScheme name="Office">
+      <a:dk1>
+        <a:sysClr val="windowText" lastClr="000000"/>
+      </a:dk1>
+      <a:lt1>
+        <a:sysClr val="window" lastClr="FFFFFF"/>
+      </a:lt1>
+      <a:dk2>
+        <a:srgbClr val="0E2841"/>
+      </a:dk2>
+      <a:lt2>
+        <a:srgbClr val="E8E8E8"/>
+      </a:lt2>
+      <a:accent1>
+        <a:srgbClr val="156082"/>
+      </a:accent1>
+      <a:accent2>
+        <a:srgbClr val="E97132"/>
+      </a:accent2>
+      <a:accent3>
+        <a:srgbClr val="196B24"/>
+      </a:accent3>
+      <a:accent4>
+        <a:srgbClr val="0F9ED5"/>
+      </a:accent4>
+      <a:accent5>
+        <a:srgbClr val="A02B93"/>
+      </a:accent5>
+      <a:accent6>
+        <a:srgbClr val="4EA72E"/>
+      </a:accent6>
+      <a:hlink>
+        <a:srgbClr val="467886"/>
+      </a:hlink>
+      <a:folHlink>
+        <a:srgbClr val="96607D"/>
+      </a:folHlink>
+    </a:clrScheme>
+    <a:fontScheme name="Office">
+      <a:majorFont>
+        <a:latin typeface="Aptos Display" panose="02110004020202020204"/>
+        <a:ea typeface=""/>
+        <a:cs typeface=""/>
+        <a:font script="Jpan" typeface="游ゴシック Light"/>
+        <a:font script="Hang" typeface="맑은 고딕"/>
+        <a:font script="Hans" typeface="等线 Light"/>
+        <a:font script="Hant" typeface="新細明體"/>
+        <a:font script="Arab" typeface="Times New Roman"/>
+        <a:font script="Hebr" typeface="Times New Roman"/>
+        <a:font script="Thai" typeface="Angsana New"/>
+        <a:font script="Ethi" typeface="Nyala"/>
+        <a:font script="Beng" typeface="Vrinda"/>
+        <a:font script="Gujr" typeface="Shruti"/>
+        <a:font script="Khmr" typeface="MoolBoran"/>
+        <a:font script="Knda" typeface="Tunga"/>
+        <a:font script="Guru" typeface="Raavi"/>
+        <a:font script="Cans" typeface="Euphemia"/>
+        <a:font script="Cher" typeface="Plantagenet Cherokee"/>
+        <a:font script="Yiii" typeface="Microsoft Yi Baiti"/>
+        <a:font script="Tibt" typeface="Microsoft Himalaya"/>
+        <a:font script="Thaa" typeface="MV Boli"/>
+        <a:font script="Deva" typeface="Mangal"/>
+        <a:font script="Telu" typeface="Gautami"/>
+        <a:font script="Taml" typeface="Latha"/>
+        <a:font script="Syrc" typeface="Estrangelo Edessa"/>
+        <a:font script="Orya" typeface="Kalinga"/>
+        <a:font script="Mlym" typeface="Kartika"/>
+        <a:font script="Laoo" typeface="DokChampa"/>
+        <a:font script="Sinh" typeface="Iskoola Pota"/>
+        <a:font script="Mong" typeface="Mongolian Baiti"/>
+        <a:font script="Viet" typeface="Times New Roman"/>
+        <a:font script="Uigh" typeface="Microsoft Uighur"/>
+        <a:font script="Geor" typeface="Sylfaen"/>
+        <a:font script="Armn" typeface="Arial"/>
+        <a:font script="Bugi" typeface="Leelawadee UI"/>
+        <a:font script="Bopo" typeface="Microsoft JhengHei"/>
+        <a:font script="Java" typeface="Javanese Text"/>
+        <a:font script="Lisu" typeface="Segoe UI"/>
+        <a:font script="Mymr" typeface="Myanmar Text"/>
+        <a:font script="Nkoo" typeface="Ebrima"/>
+        <a:font script="Olck" typeface="Nirmala UI"/>
+        <a:font script="Osma" typeface="Ebrima"/>
+        <a:font script="Phag" typeface="Phagspa"/>
+        <a:font script="Syrn" typeface="Estrangelo Edessa"/>
+        <a:font script="Syrj" typeface="Estrangelo Edessa"/>
+        <a:font script="Syre" typeface="Estrangelo Edessa"/>
+        <a:font script="Sora" typeface="Nirmala UI"/>
+        <a:font script="Tale" typeface="Microsoft Tai Le"/>
+        <a:font script="Talu" typeface="Microsoft New Tai Lue"/>
+        <a:font script="Tfng" typeface="Ebrima"/>
+      </a:majorFont>
+      <a:minorFont>
+        <a:latin typeface="Aptos" panose="02110004020202020204"/>
+        <a:ea typeface=""/>
+        <a:cs typeface=""/>
+        <a:font script="Jpan" typeface="游ゴシック"/>
+        <a:font script="Hang" typeface="맑은 고딕"/>
+        <a:font script="Hans" typeface="等线"/>
+        <a:font script="Hant" typeface="新細明體"/>
+        <a:font script="Arab" typeface="Arial"/>
+        <a:font script="Hebr" typeface="Arial"/>
+        <a:font script="Thai" typeface="Cordia New"/>
+        <a:font script="Ethi" typeface="Nyala"/>
+        <a:font script="Beng" typeface="Vrinda"/>
+        <a:font script="Gujr" typeface="Shruti"/>
+        <a:font script="Khmr" typeface="DaunPenh"/>
+        <a:font script="Knda" typeface="Tunga"/>
+        <a:font script="Guru" typeface="Raavi"/>
+        <a:font script="Cans" typeface="Euphemia"/>
+        <a:font script="Cher" typeface="Plantagenet Cherokee"/>
+        <a:font script="Yiii" typeface="Microsoft Yi Baiti"/>
+        <a:font script="Tibt" typeface="Microsoft Himalaya"/>
+        <a:font script="Thaa" typeface="MV Boli"/>
+        <a:font script="Deva" typeface="Mangal"/>
+        <a:font script="Telu" typeface="Gautami"/>
+        <a:font script="Taml" typeface="Latha"/>
+        <a:font script="Syrc" typeface="Estrangelo Edessa"/>
+        <a:font script="Orya" typeface="Kalinga"/>
+        <a:font script="Mlym" typeface="Kartika"/>
+        <a:font script="Laoo" typeface="DokChampa"/>
+        <a:font script="Sinh" typeface="Iskoola Pota"/>
+        <a:font script="Mong" typeface="Mongolian Baiti"/>
+        <a:font script="Viet" typeface="Arial"/>
+        <a:font script="Uigh" typeface="Microsoft Uighur"/>
+        <a:font script="Geor" typeface="Sylfaen"/>
+        <a:font script="Armn" typeface="Arial"/>
+        <a:font script="Bugi" typeface="Leelawadee UI"/>
+        <a:font script="Bopo" typeface="Microsoft JhengHei"/>
+        <a:font script="Java" typeface="Javanese Text"/>
+        <a:font script="Lisu" typeface="Segoe UI"/>
+        <a:font script="Mymr" typeface="Myanmar Text"/>
+        <a:font script="Nkoo" typeface="Ebrima"/>
+        <a:font script="Olck" typeface="Nirmala UI"/>
+        <a:font script="Osma" typeface="Ebrima"/>
+        <a:font script="Phag" typeface="Phagspa"/>
+        <a:font script="Syrn" typeface="Estrangelo Edessa"/>
+        <a:font script="Syrj" typeface="Estrangelo Edessa"/>
+        <a:font script="Syre" typeface="Estrangelo Edessa"/>
+        <a:font script="Sora" typeface="Nirmala UI"/>
+        <a:font script="Tale" typeface="Microsoft Tai Le"/>
+        <a:font script="Talu" typeface="Microsoft New Tai Lue"/>
+        <a:font script="Tfng" typeface="Ebrima"/>
+      </a:minorFont>
+    </a:fontScheme>
+    <a:fmtScheme name="Office">
+      <a:fillStyleLst>
+        <a:solidFill>
+          <a:schemeClr val="phClr"/>
+        </a:solidFill>
+        <a:gradFill rotWithShape="1">
+          <a:gsLst>
+            <a:gs pos="0">
+              <a:schemeClr val="phClr">
+                <a:lumMod val="110000"/>
+                <a:satMod val="105000"/>
+                <a:tint val="67000"/>
+              </a:schemeClr>
+            </a:gs>
+            <a:gs pos="50000">
+              <a:schemeClr val="phClr">
+                <a:lumMod val="105000"/>
+                <a:satMod val="103000"/>
+                <a:tint val="73000"/>
+              </a:schemeClr>
+            </a:gs>
+            <a:gs pos="100000">
+              <a:schemeClr val="phClr">
+                <a:lumMod val="105000"/>
+                <a:satMod val="109000"/>
+                <a:tint val="81000"/>
+              </a:schemeClr>
+            </a:gs>
+          </a:gsLst>
+          <a:lin ang="5400000" scaled="0"/>
+        </a:gradFill>
+        <a:gradFill rotWithShape="1">
+          <a:gsLst>
+            <a:gs pos="0">
+              <a:schemeClr val="phClr">
+                <a:satMod val="103000"/>
+                <a:lumMod val="102000"/>
+                <a:tint val="94000"/>
+              </a:schemeClr>
+            </a:gs>
+            <a:gs pos="50000">
+              <a:schemeClr val="phClr">
+                <a:satMod val="110000"/>
+                <a:lumMod val="100000"/>
+                <a:shade val="100000"/>
+              </a:schemeClr>
+            </a:gs>
+            <a:gs pos="100000">
+              <a:schemeClr val="phClr">
+                <a:lumMod val="99000"/>
+                <a:satMod val="120000"/>
+                <a:shade val="78000"/>
+              </a:schemeClr>
+            </a:gs>
+          </a:gsLst>
+          <a:lin ang="5400000" scaled="0"/>
+        </a:gradFill>
+      </a:fillStyleLst>
+      <a:lnStyleLst>
+        <a:ln w="12700" cap="flat" cmpd="sng" algn="ctr">
+          <a:solidFill>
+            <a:schemeClr val="phClr"/>
+          </a:solidFill>
+          <a:prstDash val="solid"/>
+          <a:miter lim="800000"/>
+        </a:ln>
+        <a:ln w="19050" cap="flat" cmpd="sng" algn="ctr">
+          <a:solidFill>
+            <a:schemeClr val="phClr"/>
+          </a:solidFill>
+          <a:prstDash val="solid"/>
+          <a:miter lim="800000"/>
+        </a:ln>
+        <a:ln w="25400" cap="flat" cmpd="sng" algn="ctr">
+          <a:solidFill>
+            <a:schemeClr val="phClr"/>
+          </a:solidFill>
+          <a:prstDash val="solid"/>
+          <a:miter lim="800000"/>
+        </a:ln>
+      </a:lnStyleLst>
+      <a:effectStyleLst>
+        <a:effectStyle>
+          <a:effectLst/>
+        </a:effectStyle>
+        <a:effectStyle>
+          <a:effectLst/>
+        </a:effectStyle>
+        <a:effectStyle>
+          <a:effectLst>
+            <a:outerShdw blurRad="57150" dist="19050" dir="5400000" algn="ctr" rotWithShape="0">
+              <a:srgbClr val="000000">
+                <a:alpha val="63000"/>
+              </a:srgbClr>
+            </a:outerShdw>
+          </a:effectLst>
+        </a:effectStyle>
+      </a:effectStyleLst>
+      <a:bgFillStyleLst>
+        <a:solidFill>
+          <a:schemeClr val="phClr"/>
+        </a:solidFill>
+        <a:solidFill>
+          <a:schemeClr val="phClr">
+            <a:tint val="95000"/>
+            <a:satMod val="170000"/>
+          </a:schemeClr>
+        </a:solidFill>
+        <a:gradFill rotWithShape="1">
+          <a:gsLst>
+            <a:gs pos="0">
+              <a:schemeClr val="phClr">
+                <a:tint val="93000"/>
+                <a:satMod val="150000"/>
+                <a:shade val="98000"/>
+                <a:lumMod val="102000"/>
+              </a:schemeClr>
+            </a:gs>
+            <a:gs pos="50000">
+              <a:schemeClr val="phClr">
+                <a:tint val="98000"/>
+                <a:satMod val="130000"/>
+                <a:shade val="90000"/>
+                <a:lumMod val="103000"/>
+              </a:schemeClr>
+            </a:gs>
+            <a:gs pos="100000">
+              <a:schemeClr val="phClr">
+                <a:shade val="63000"/>
+                <a:satMod val="120000"/>
+              </a:schemeClr>
+            </a:gs>
+          </a:gsLst>
+          <a:lin ang="5400000" scaled="0"/>
+        </a:gradFill>
+      </a:bgFillStyleLst>
+    </a:fmtScheme>
+  </a:themeElements>
+  <a:objectDefaults>
+    <a:lnDef>
+      <a:spPr/>
+      <a:bodyPr/>
+      <a:lstStyle/>
+      <a:style>
+        <a:lnRef idx="2">
+          <a:schemeClr val="accent1"/>
+        </a:lnRef>
+        <a:fillRef idx="0">
+          <a:schemeClr val="accent1"/>
+        </a:fillRef>
+        <a:effectRef idx="1">
+          <a:schemeClr val="accent1"/>
+        </a:effectRef>
+        <a:fontRef idx="minor">
+          <a:schemeClr val="tx1"/>
+        </a:fontRef>
+      </a:style>
+    </a:lnDef>
+  </a:objectDefaults>
+  <a:extraClrSchemeLst/>
+  <a:extLst>
+    <a:ext uri="{05A4C25C-085E-4340-85A3-A5531E510DB2}">
+      <thm15:themeFamily xmlns:thm15="http://schemas.microsoft.com/office/thememl/2012/main" name="Office Theme" id="{2E142A2C-CD16-42D6-873A-C26D2A0506FA}" vid="{1BDDFF52-6CD6-40A5-AB3C-68EB2F1E4D0A}"/>
+    </a:ext>
+  </a:extLst>
+</a:theme>
 </file>